--- a/docs/AarogyaTwinX_Presentation.pptx
+++ b/docs/AarogyaTwinX_Presentation.pptx
@@ -179,7 +179,7 @@
         </p:nvSpPr>
         <p:spPr>
           <a:xfrm>
-            <a:off x="749808" y="1261872"/>
+            <a:off x="658368" y="1261872"/>
             <a:ext cx="10698480" cy="4800600"/>
           </a:xfrm>
           <a:prstGeom prst="rect">
@@ -395,8 +395,8 @@
         </p:nvSpPr>
         <p:spPr>
           <a:xfrm>
-            <a:off x="749808" y="1261872"/>
-            <a:ext cx="10698480" cy="4800600"/>
+            <a:off x="658368" y="1261872"/>
+            <a:ext cx="3886200" cy="4800600"/>
           </a:xfrm>
           <a:prstGeom prst="rect">
             <a:avLst/>
@@ -414,7 +414,7 @@
               <a:buChar char="•"/>
             </a:pPr>
             <a:r>
-              <a:rPr lang="en-US" sz="1700">
+              <a:rPr lang="en-US" sz="1500">
                 <a:solidFill>
                   <a:srgbClr val="26364D"/>
                 </a:solidFill>
@@ -422,14 +422,14 @@
               </a:rPr>
               <a:t>Natural missingness: about 0.3% abstention</a:t>
             </a:r>
-            <a:endParaRPr lang="en-US" sz="1700"/>
+            <a:endParaRPr lang="en-US" sz="1500"/>
           </a:p>
           <a:p>
             <a:pPr lvl="0">
               <a:buChar char="•"/>
             </a:pPr>
             <a:r>
-              <a:rPr lang="en-US" sz="1700">
+              <a:rPr lang="en-US" sz="1500">
                 <a:solidFill>
                   <a:srgbClr val="26364D"/>
                 </a:solidFill>
@@ -437,14 +437,14 @@
               </a:rPr>
               <a:t>Recent stream gaps degrade measured forecasts</a:t>
             </a:r>
-            <a:endParaRPr lang="en-US" sz="1700"/>
+            <a:endParaRPr lang="en-US" sz="1500"/>
           </a:p>
           <a:p>
             <a:pPr lvl="0">
               <a:buChar char="•"/>
             </a:pPr>
             <a:r>
-              <a:rPr lang="en-US" sz="1700">
+              <a:rPr lang="en-US" sz="1500">
                 <a:solidFill>
                   <a:srgbClr val="26364D"/>
                 </a:solidFill>
@@ -452,14 +452,14 @@
               </a:rPr>
               <a:t>Recent 30-minute CGM dropout: 100% abstention</a:t>
             </a:r>
-            <a:endParaRPr lang="en-US" sz="1700"/>
+            <a:endParaRPr lang="en-US" sz="1500"/>
           </a:p>
           <a:p>
             <a:pPr lvl="0">
               <a:buChar char="•"/>
             </a:pPr>
             <a:r>
-              <a:rPr lang="en-US" sz="1700">
+              <a:rPr lang="en-US" sz="1500">
                 <a:solidFill>
                   <a:srgbClr val="26364D"/>
                 </a:solidFill>
@@ -467,7 +467,389 @@
               </a:rPr>
               <a:t>Unavailable estimates remain null</a:t>
             </a:r>
-            <a:endParaRPr lang="en-US" sz="1700"/>
+            <a:endParaRPr lang="en-US" sz="1500"/>
+          </a:p>
+        </p:txBody>
+      </p:sp>
+      <p:sp>
+        <p:nvSpPr>
+          <p:cNvPr id="20" name="card-20"/>
+          <p:cNvSpPr/>
+          <p:nvPr/>
+        </p:nvSpPr>
+        <p:spPr>
+          <a:xfrm>
+            <a:off x="4892040" y="1417320"/>
+            <a:ext cx="1417320" cy="1024128"/>
+          </a:xfrm>
+          <a:prstGeom prst="rect">
+            <a:avLst/>
+          </a:prstGeom>
+          <a:solidFill>
+            <a:srgbClr val="159B9A"/>
+          </a:solidFill>
+          <a:ln>
+            <a:noFill/>
+          </a:ln>
+        </p:spPr>
+      </p:sp>
+      <p:sp>
+        <p:nvSpPr>
+          <p:cNvPr id="21" name="card-text-20"/>
+          <p:cNvSpPr/>
+          <p:nvPr/>
+        </p:nvSpPr>
+        <p:spPr>
+          <a:xfrm>
+            <a:off x="4983480" y="1508760"/>
+            <a:ext cx="1234440" cy="841248"/>
+          </a:xfrm>
+          <a:prstGeom prst="rect">
+            <a:avLst/>
+          </a:prstGeom>
+          <a:noFill/>
+          <a:ln>
+            <a:noFill/>
+          </a:ln>
+        </p:spPr>
+        <p:txBody>
+          <a:bodyPr wrap="square" rtlCol="0"/>
+          <a:lstStyle/>
+          <a:p>
+            <a:pPr lvl="0">
+              <a:buNone/>
+            </a:pPr>
+            <a:r>
+              <a:rPr lang="en-US" sz="1400" b="1">
+                <a:solidFill>
+                  <a:srgbClr val="FFFFFF"/>
+                </a:solidFill>
+                <a:latin typeface="Aptos"/>
+              </a:rPr>
+              <a:t>CONNECTED</a:t>
+            </a:r>
+            <a:endParaRPr lang="en-US" sz="1400"/>
+          </a:p>
+          <a:p>
+            <a:pPr lvl="0">
+              <a:buNone/>
+            </a:pPr>
+            <a:r>
+              <a:rPr lang="en-US" sz="900">
+                <a:solidFill>
+                  <a:srgbClr val="EAF4F5"/>
+                </a:solidFill>
+                <a:latin typeface="Aptos"/>
+              </a:rPr>
+              <a:t>fresh CGM</a:t>
+            </a:r>
+            <a:endParaRPr lang="en-US" sz="900"/>
+          </a:p>
+        </p:txBody>
+      </p:sp>
+      <p:sp>
+        <p:nvSpPr>
+          <p:cNvPr id="22" name="arrow-22"/>
+          <p:cNvSpPr/>
+          <p:nvPr/>
+        </p:nvSpPr>
+        <p:spPr>
+          <a:xfrm>
+            <a:off x="6318504" y="1700784"/>
+            <a:ext cx="260000" cy="430000"/>
+          </a:xfrm>
+          <a:prstGeom prst="rect">
+            <a:avLst/>
+          </a:prstGeom>
+          <a:noFill/>
+          <a:ln>
+            <a:noFill/>
+          </a:ln>
+        </p:spPr>
+        <p:txBody>
+          <a:bodyPr wrap="square" rtlCol="0"/>
+          <a:lstStyle/>
+          <a:p>
+            <a:pPr lvl="0">
+              <a:buNone/>
+            </a:pPr>
+            <a:r>
+              <a:rPr lang="en-US" sz="2200" b="1">
+                <a:solidFill>
+                  <a:srgbClr val="7667E8"/>
+                </a:solidFill>
+                <a:latin typeface="Aptos"/>
+              </a:rPr>
+              <a:t>→</a:t>
+            </a:r>
+            <a:endParaRPr lang="en-US" sz="2200"/>
+          </a:p>
+        </p:txBody>
+      </p:sp>
+      <p:sp>
+        <p:nvSpPr>
+          <p:cNvPr id="23" name="card-23"/>
+          <p:cNvSpPr/>
+          <p:nvPr/>
+        </p:nvSpPr>
+        <p:spPr>
+          <a:xfrm>
+            <a:off x="6510528" y="1417320"/>
+            <a:ext cx="1417320" cy="1024128"/>
+          </a:xfrm>
+          <a:prstGeom prst="rect">
+            <a:avLst/>
+          </a:prstGeom>
+          <a:solidFill>
+            <a:srgbClr val="D58A36"/>
+          </a:solidFill>
+          <a:ln>
+            <a:noFill/>
+          </a:ln>
+        </p:spPr>
+      </p:sp>
+      <p:sp>
+        <p:nvSpPr>
+          <p:cNvPr id="24" name="card-text-23"/>
+          <p:cNvSpPr/>
+          <p:nvPr/>
+        </p:nvSpPr>
+        <p:spPr>
+          <a:xfrm>
+            <a:off x="6601968" y="1508760"/>
+            <a:ext cx="1234440" cy="841248"/>
+          </a:xfrm>
+          <a:prstGeom prst="rect">
+            <a:avLst/>
+          </a:prstGeom>
+          <a:noFill/>
+          <a:ln>
+            <a:noFill/>
+          </a:ln>
+        </p:spPr>
+        <p:txBody>
+          <a:bodyPr wrap="square" rtlCol="0"/>
+          <a:lstStyle/>
+          <a:p>
+            <a:pPr lvl="0">
+              <a:buNone/>
+            </a:pPr>
+            <a:r>
+              <a:rPr lang="en-US" sz="1400" b="1">
+                <a:solidFill>
+                  <a:srgbClr val="FFFFFF"/>
+                </a:solidFill>
+                <a:latin typeface="Aptos"/>
+              </a:rPr>
+              <a:t>GAP</a:t>
+            </a:r>
+            <a:endParaRPr lang="en-US" sz="1400"/>
+          </a:p>
+          <a:p>
+            <a:pPr lvl="0">
+              <a:buNone/>
+            </a:pPr>
+            <a:r>
+              <a:rPr lang="en-US" sz="900">
+                <a:solidFill>
+                  <a:srgbClr val="EAF4F5"/>
+                </a:solidFill>
+                <a:latin typeface="Aptos"/>
+              </a:rPr>
+              <a:t>warning</a:t>
+            </a:r>
+            <a:endParaRPr lang="en-US" sz="900"/>
+          </a:p>
+        </p:txBody>
+      </p:sp>
+      <p:sp>
+        <p:nvSpPr>
+          <p:cNvPr id="25" name="arrow-25"/>
+          <p:cNvSpPr/>
+          <p:nvPr/>
+        </p:nvSpPr>
+        <p:spPr>
+          <a:xfrm>
+            <a:off x="7936992" y="1700784"/>
+            <a:ext cx="260000" cy="430000"/>
+          </a:xfrm>
+          <a:prstGeom prst="rect">
+            <a:avLst/>
+          </a:prstGeom>
+          <a:noFill/>
+          <a:ln>
+            <a:noFill/>
+          </a:ln>
+        </p:spPr>
+        <p:txBody>
+          <a:bodyPr wrap="square" rtlCol="0"/>
+          <a:lstStyle/>
+          <a:p>
+            <a:pPr lvl="0">
+              <a:buNone/>
+            </a:pPr>
+            <a:r>
+              <a:rPr lang="en-US" sz="2200" b="1">
+                <a:solidFill>
+                  <a:srgbClr val="7667E8"/>
+                </a:solidFill>
+                <a:latin typeface="Aptos"/>
+              </a:rPr>
+              <a:t>→</a:t>
+            </a:r>
+            <a:endParaRPr lang="en-US" sz="2200"/>
+          </a:p>
+        </p:txBody>
+      </p:sp>
+      <p:sp>
+        <p:nvSpPr>
+          <p:cNvPr id="26" name="card-26"/>
+          <p:cNvSpPr/>
+          <p:nvPr/>
+        </p:nvSpPr>
+        <p:spPr>
+          <a:xfrm>
+            <a:off x="8129016" y="1417320"/>
+            <a:ext cx="1417320" cy="1024128"/>
+          </a:xfrm>
+          <a:prstGeom prst="rect">
+            <a:avLst/>
+          </a:prstGeom>
+          <a:solidFill>
+            <a:srgbClr val="14253D"/>
+          </a:solidFill>
+          <a:ln>
+            <a:noFill/>
+          </a:ln>
+        </p:spPr>
+      </p:sp>
+      <p:sp>
+        <p:nvSpPr>
+          <p:cNvPr id="27" name="card-text-26"/>
+          <p:cNvSpPr/>
+          <p:nvPr/>
+        </p:nvSpPr>
+        <p:spPr>
+          <a:xfrm>
+            <a:off x="8220456" y="1508760"/>
+            <a:ext cx="1234440" cy="841248"/>
+          </a:xfrm>
+          <a:prstGeom prst="rect">
+            <a:avLst/>
+          </a:prstGeom>
+          <a:noFill/>
+          <a:ln>
+            <a:noFill/>
+          </a:ln>
+        </p:spPr>
+        <p:txBody>
+          <a:bodyPr wrap="square" rtlCol="0"/>
+          <a:lstStyle/>
+          <a:p>
+            <a:pPr lvl="0">
+              <a:buNone/>
+            </a:pPr>
+            <a:r>
+              <a:rPr lang="en-US" sz="1400" b="1">
+                <a:solidFill>
+                  <a:srgbClr val="FFFFFF"/>
+                </a:solidFill>
+                <a:latin typeface="Aptos"/>
+              </a:rPr>
+              <a:t>DROPOUT</a:t>
+            </a:r>
+            <a:endParaRPr lang="en-US" sz="1400"/>
+          </a:p>
+          <a:p>
+            <a:pPr lvl="0">
+              <a:buNone/>
+            </a:pPr>
+            <a:r>
+              <a:rPr lang="en-US" sz="900">
+                <a:solidFill>
+                  <a:srgbClr val="EAF4F5"/>
+                </a:solidFill>
+                <a:latin typeface="Aptos"/>
+              </a:rPr>
+              <a:t>abstain</a:t>
+            </a:r>
+            <a:endParaRPr lang="en-US" sz="900"/>
+          </a:p>
+        </p:txBody>
+      </p:sp>
+      <p:sp>
+        <p:nvSpPr>
+          <p:cNvPr id="28" name="card-28"/>
+          <p:cNvSpPr/>
+          <p:nvPr/>
+        </p:nvSpPr>
+        <p:spPr>
+          <a:xfrm>
+            <a:off x="4892040" y="3017520"/>
+            <a:ext cx="6309360" cy="1024128"/>
+          </a:xfrm>
+          <a:prstGeom prst="rect">
+            <a:avLst/>
+          </a:prstGeom>
+          <a:solidFill>
+            <a:srgbClr val="14253D"/>
+          </a:solidFill>
+          <a:ln>
+            <a:noFill/>
+          </a:ln>
+        </p:spPr>
+      </p:sp>
+      <p:sp>
+        <p:nvSpPr>
+          <p:cNvPr id="29" name="card-text-28"/>
+          <p:cNvSpPr/>
+          <p:nvPr/>
+        </p:nvSpPr>
+        <p:spPr>
+          <a:xfrm>
+            <a:off x="4983480" y="3108960"/>
+            <a:ext cx="6126480" cy="841248"/>
+          </a:xfrm>
+          <a:prstGeom prst="rect">
+            <a:avLst/>
+          </a:prstGeom>
+          <a:noFill/>
+          <a:ln>
+            <a:noFill/>
+          </a:ln>
+        </p:spPr>
+        <p:txBody>
+          <a:bodyPr wrap="square" rtlCol="0"/>
+          <a:lstStyle/>
+          <a:p>
+            <a:pPr lvl="0">
+              <a:buNone/>
+            </a:pPr>
+            <a:r>
+              <a:rPr lang="en-US" sz="1400" b="1">
+                <a:solidFill>
+                  <a:srgbClr val="FFFFFF"/>
+                </a:solidFill>
+                <a:latin typeface="Aptos"/>
+              </a:rPr>
+              <a:t>POLICY</a:t>
+            </a:r>
+            <a:endParaRPr lang="en-US" sz="1400"/>
+          </a:p>
+          <a:p>
+            <a:pPr lvl="0">
+              <a:buNone/>
+            </a:pPr>
+            <a:r>
+              <a:rPr lang="en-US" sz="900">
+                <a:solidFill>
+                  <a:srgbClr val="EAF4F5"/>
+                </a:solidFill>
+                <a:latin typeface="Aptos"/>
+              </a:rPr>
+              <a:t>CGM older than 15 minutes -&gt; forecast empty, estimates null, reason visible.</a:t>
+            </a:r>
+            <a:endParaRPr lang="en-US" sz="900"/>
           </a:p>
         </p:txBody>
       </p:sp>
@@ -626,8 +1008,8 @@
         </p:nvSpPr>
         <p:spPr>
           <a:xfrm>
-            <a:off x="749808" y="1261872"/>
-            <a:ext cx="10698480" cy="4800600"/>
+            <a:off x="658368" y="1261872"/>
+            <a:ext cx="3886200" cy="4800600"/>
           </a:xfrm>
           <a:prstGeom prst="rect">
             <a:avLst/>
@@ -645,7 +1027,7 @@
               <a:buChar char="•"/>
             </a:pPr>
             <a:r>
-              <a:rPr lang="en-US" sz="1700">
+              <a:rPr lang="en-US" sz="1500">
                 <a:solidFill>
                   <a:srgbClr val="26364D"/>
                 </a:solidFill>
@@ -653,14 +1035,14 @@
               </a:rPr>
               <a:t>Nominal 120-minute coverage: 89.46%</a:t>
             </a:r>
-            <a:endParaRPr lang="en-US" sz="1700"/>
+            <a:endParaRPr lang="en-US" sz="1500"/>
           </a:p>
           <a:p>
             <a:pPr lvl="0">
               <a:buChar char="•"/>
             </a:pPr>
             <a:r>
-              <a:rPr lang="en-US" sz="1700">
+              <a:rPr lang="en-US" sz="1500">
                 <a:solidFill>
                   <a:srgbClr val="26364D"/>
                 </a:solidFill>
@@ -668,14 +1050,14 @@
               </a:rPr>
               <a:t>Glucose level +25 mg/dL: coverage 62.09%</a:t>
             </a:r>
-            <a:endParaRPr lang="en-US" sz="1700"/>
+            <a:endParaRPr lang="en-US" sz="1500"/>
           </a:p>
           <a:p>
             <a:pPr lvl="0">
               <a:buChar char="•"/>
             </a:pPr>
             <a:r>
-              <a:rPr lang="en-US" sz="1700">
+              <a:rPr lang="en-US" sz="1500">
                 <a:solidFill>
                   <a:srgbClr val="26364D"/>
                 </a:solidFill>
@@ -683,14 +1065,14 @@
               </a:rPr>
               <a:t>Meal inputs doubled: coverage 89.35%</a:t>
             </a:r>
-            <a:endParaRPr lang="en-US" sz="1700"/>
+            <a:endParaRPr lang="en-US" sz="1500"/>
           </a:p>
           <a:p>
             <a:pPr lvl="0">
               <a:buChar char="•"/>
             </a:pPr>
             <a:r>
-              <a:rPr lang="en-US" sz="1700">
+              <a:rPr lang="en-US" sz="1500">
                 <a:solidFill>
                   <a:srgbClr val="26364D"/>
                 </a:solidFill>
@@ -698,14 +1080,14 @@
               </a:rPr>
               <a:t>HbA1c +1.0: coverage 80.26%</a:t>
             </a:r>
-            <a:endParaRPr lang="en-US" sz="1700"/>
+            <a:endParaRPr lang="en-US" sz="1500"/>
           </a:p>
           <a:p>
             <a:pPr lvl="0">
               <a:buChar char="•"/>
             </a:pPr>
             <a:r>
-              <a:rPr lang="en-US" sz="1700">
+              <a:rPr lang="en-US" sz="1500">
                 <a:solidFill>
                   <a:srgbClr val="26364D"/>
                 </a:solidFill>
@@ -713,7 +1095,428 @@
               </a:rPr>
               <a:t>Stress tests show known failure modes</a:t>
             </a:r>
-            <a:endParaRPr lang="en-US" sz="1700"/>
+            <a:endParaRPr lang="en-US" sz="1500"/>
+          </a:p>
+        </p:txBody>
+      </p:sp>
+      <p:sp>
+        <p:nvSpPr>
+          <p:cNvPr id="20" name="card-20"/>
+          <p:cNvSpPr/>
+          <p:nvPr/>
+        </p:nvSpPr>
+        <p:spPr>
+          <a:xfrm>
+            <a:off x="4892040" y="1417320"/>
+            <a:ext cx="1417320" cy="1024128"/>
+          </a:xfrm>
+          <a:prstGeom prst="rect">
+            <a:avLst/>
+          </a:prstGeom>
+          <a:solidFill>
+            <a:srgbClr val="159B9A"/>
+          </a:solidFill>
+          <a:ln>
+            <a:noFill/>
+          </a:ln>
+        </p:spPr>
+      </p:sp>
+      <p:sp>
+        <p:nvSpPr>
+          <p:cNvPr id="21" name="card-text-20"/>
+          <p:cNvSpPr/>
+          <p:nvPr/>
+        </p:nvSpPr>
+        <p:spPr>
+          <a:xfrm>
+            <a:off x="4983480" y="1508760"/>
+            <a:ext cx="1234440" cy="841248"/>
+          </a:xfrm>
+          <a:prstGeom prst="rect">
+            <a:avLst/>
+          </a:prstGeom>
+          <a:noFill/>
+          <a:ln>
+            <a:noFill/>
+          </a:ln>
+        </p:spPr>
+        <p:txBody>
+          <a:bodyPr wrap="square" rtlCol="0"/>
+          <a:lstStyle/>
+          <a:p>
+            <a:pPr lvl="0">
+              <a:buNone/>
+            </a:pPr>
+            <a:r>
+              <a:rPr lang="en-US" sz="1400" b="1">
+                <a:solidFill>
+                  <a:srgbClr val="FFFFFF"/>
+                </a:solidFill>
+                <a:latin typeface="Aptos"/>
+              </a:rPr>
+              <a:t>NOMINAL</a:t>
+            </a:r>
+            <a:endParaRPr lang="en-US" sz="1400"/>
+          </a:p>
+          <a:p>
+            <a:pPr lvl="0">
+              <a:buNone/>
+            </a:pPr>
+            <a:r>
+              <a:rPr lang="en-US" sz="900">
+                <a:solidFill>
+                  <a:srgbClr val="EAF4F5"/>
+                </a:solidFill>
+                <a:latin typeface="Aptos"/>
+              </a:rPr>
+              <a:t>89.46% cov.</a:t>
+            </a:r>
+            <a:endParaRPr lang="en-US" sz="900"/>
+          </a:p>
+        </p:txBody>
+      </p:sp>
+      <p:sp>
+        <p:nvSpPr>
+          <p:cNvPr id="22" name="arrow-22"/>
+          <p:cNvSpPr/>
+          <p:nvPr/>
+        </p:nvSpPr>
+        <p:spPr>
+          <a:xfrm>
+            <a:off x="6318504" y="1700784"/>
+            <a:ext cx="260000" cy="430000"/>
+          </a:xfrm>
+          <a:prstGeom prst="rect">
+            <a:avLst/>
+          </a:prstGeom>
+          <a:noFill/>
+          <a:ln>
+            <a:noFill/>
+          </a:ln>
+        </p:spPr>
+        <p:txBody>
+          <a:bodyPr wrap="square" rtlCol="0"/>
+          <a:lstStyle/>
+          <a:p>
+            <a:pPr lvl="0">
+              <a:buNone/>
+            </a:pPr>
+            <a:r>
+              <a:rPr lang="en-US" sz="2200" b="1">
+                <a:solidFill>
+                  <a:srgbClr val="7667E8"/>
+                </a:solidFill>
+                <a:latin typeface="Aptos"/>
+              </a:rPr>
+              <a:t>→</a:t>
+            </a:r>
+            <a:endParaRPr lang="en-US" sz="2200"/>
+          </a:p>
+        </p:txBody>
+      </p:sp>
+      <p:sp>
+        <p:nvSpPr>
+          <p:cNvPr id="23" name="card-23"/>
+          <p:cNvSpPr/>
+          <p:nvPr/>
+        </p:nvSpPr>
+        <p:spPr>
+          <a:xfrm>
+            <a:off x="6510528" y="1417320"/>
+            <a:ext cx="1417320" cy="1024128"/>
+          </a:xfrm>
+          <a:prstGeom prst="rect">
+            <a:avLst/>
+          </a:prstGeom>
+          <a:solidFill>
+            <a:srgbClr val="D58A36"/>
+          </a:solidFill>
+          <a:ln>
+            <a:noFill/>
+          </a:ln>
+        </p:spPr>
+      </p:sp>
+      <p:sp>
+        <p:nvSpPr>
+          <p:cNvPr id="24" name="card-text-23"/>
+          <p:cNvSpPr/>
+          <p:nvPr/>
+        </p:nvSpPr>
+        <p:spPr>
+          <a:xfrm>
+            <a:off x="6601968" y="1508760"/>
+            <a:ext cx="1234440" cy="841248"/>
+          </a:xfrm>
+          <a:prstGeom prst="rect">
+            <a:avLst/>
+          </a:prstGeom>
+          <a:noFill/>
+          <a:ln>
+            <a:noFill/>
+          </a:ln>
+        </p:spPr>
+        <p:txBody>
+          <a:bodyPr wrap="square" rtlCol="0"/>
+          <a:lstStyle/>
+          <a:p>
+            <a:pPr lvl="0">
+              <a:buNone/>
+            </a:pPr>
+            <a:r>
+              <a:rPr lang="en-US" sz="1400" b="1">
+                <a:solidFill>
+                  <a:srgbClr val="FFFFFF"/>
+                </a:solidFill>
+                <a:latin typeface="Aptos"/>
+              </a:rPr>
+              <a:t>GLUCOSE +25</a:t>
+            </a:r>
+            <a:endParaRPr lang="en-US" sz="1400"/>
+          </a:p>
+          <a:p>
+            <a:pPr lvl="0">
+              <a:buNone/>
+            </a:pPr>
+            <a:r>
+              <a:rPr lang="en-US" sz="900">
+                <a:solidFill>
+                  <a:srgbClr val="EAF4F5"/>
+                </a:solidFill>
+                <a:latin typeface="Aptos"/>
+              </a:rPr>
+              <a:t>62.09% cov.</a:t>
+            </a:r>
+            <a:endParaRPr lang="en-US" sz="900"/>
+          </a:p>
+        </p:txBody>
+      </p:sp>
+      <p:sp>
+        <p:nvSpPr>
+          <p:cNvPr id="25" name="arrow-25"/>
+          <p:cNvSpPr/>
+          <p:nvPr/>
+        </p:nvSpPr>
+        <p:spPr>
+          <a:xfrm>
+            <a:off x="7936992" y="1700784"/>
+            <a:ext cx="260000" cy="430000"/>
+          </a:xfrm>
+          <a:prstGeom prst="rect">
+            <a:avLst/>
+          </a:prstGeom>
+          <a:noFill/>
+          <a:ln>
+            <a:noFill/>
+          </a:ln>
+        </p:spPr>
+        <p:txBody>
+          <a:bodyPr wrap="square" rtlCol="0"/>
+          <a:lstStyle/>
+          <a:p>
+            <a:pPr lvl="0">
+              <a:buNone/>
+            </a:pPr>
+            <a:r>
+              <a:rPr lang="en-US" sz="2200" b="1">
+                <a:solidFill>
+                  <a:srgbClr val="7667E8"/>
+                </a:solidFill>
+                <a:latin typeface="Aptos"/>
+              </a:rPr>
+              <a:t>→</a:t>
+            </a:r>
+            <a:endParaRPr lang="en-US" sz="2200"/>
+          </a:p>
+        </p:txBody>
+      </p:sp>
+      <p:sp>
+        <p:nvSpPr>
+          <p:cNvPr id="26" name="card-26"/>
+          <p:cNvSpPr/>
+          <p:nvPr/>
+        </p:nvSpPr>
+        <p:spPr>
+          <a:xfrm>
+            <a:off x="8129016" y="1417320"/>
+            <a:ext cx="1417320" cy="1024128"/>
+          </a:xfrm>
+          <a:prstGeom prst="rect">
+            <a:avLst/>
+          </a:prstGeom>
+          <a:solidFill>
+            <a:srgbClr val="7667E8"/>
+          </a:solidFill>
+          <a:ln>
+            <a:noFill/>
+          </a:ln>
+        </p:spPr>
+      </p:sp>
+      <p:sp>
+        <p:nvSpPr>
+          <p:cNvPr id="27" name="card-text-26"/>
+          <p:cNvSpPr/>
+          <p:nvPr/>
+        </p:nvSpPr>
+        <p:spPr>
+          <a:xfrm>
+            <a:off x="8220456" y="1508760"/>
+            <a:ext cx="1234440" cy="841248"/>
+          </a:xfrm>
+          <a:prstGeom prst="rect">
+            <a:avLst/>
+          </a:prstGeom>
+          <a:noFill/>
+          <a:ln>
+            <a:noFill/>
+          </a:ln>
+        </p:spPr>
+        <p:txBody>
+          <a:bodyPr wrap="square" rtlCol="0"/>
+          <a:lstStyle/>
+          <a:p>
+            <a:pPr lvl="0">
+              <a:buNone/>
+            </a:pPr>
+            <a:r>
+              <a:rPr lang="en-US" sz="1400" b="1">
+                <a:solidFill>
+                  <a:srgbClr val="FFFFFF"/>
+                </a:solidFill>
+                <a:latin typeface="Aptos"/>
+              </a:rPr>
+              <a:t>MEAL x2</a:t>
+            </a:r>
+            <a:endParaRPr lang="en-US" sz="1400"/>
+          </a:p>
+          <a:p>
+            <a:pPr lvl="0">
+              <a:buNone/>
+            </a:pPr>
+            <a:r>
+              <a:rPr lang="en-US" sz="900">
+                <a:solidFill>
+                  <a:srgbClr val="EAF4F5"/>
+                </a:solidFill>
+                <a:latin typeface="Aptos"/>
+              </a:rPr>
+              <a:t>89.35% cov.</a:t>
+            </a:r>
+            <a:endParaRPr lang="en-US" sz="900"/>
+          </a:p>
+        </p:txBody>
+      </p:sp>
+      <p:sp>
+        <p:nvSpPr>
+          <p:cNvPr id="28" name="arrow-28"/>
+          <p:cNvSpPr/>
+          <p:nvPr/>
+        </p:nvSpPr>
+        <p:spPr>
+          <a:xfrm>
+            <a:off x="9555480" y="1700784"/>
+            <a:ext cx="260000" cy="430000"/>
+          </a:xfrm>
+          <a:prstGeom prst="rect">
+            <a:avLst/>
+          </a:prstGeom>
+          <a:noFill/>
+          <a:ln>
+            <a:noFill/>
+          </a:ln>
+        </p:spPr>
+        <p:txBody>
+          <a:bodyPr wrap="square" rtlCol="0"/>
+          <a:lstStyle/>
+          <a:p>
+            <a:pPr lvl="0">
+              <a:buNone/>
+            </a:pPr>
+            <a:r>
+              <a:rPr lang="en-US" sz="2200" b="1">
+                <a:solidFill>
+                  <a:srgbClr val="7667E8"/>
+                </a:solidFill>
+                <a:latin typeface="Aptos"/>
+              </a:rPr>
+              <a:t>→</a:t>
+            </a:r>
+            <a:endParaRPr lang="en-US" sz="2200"/>
+          </a:p>
+        </p:txBody>
+      </p:sp>
+      <p:sp>
+        <p:nvSpPr>
+          <p:cNvPr id="29" name="card-29"/>
+          <p:cNvSpPr/>
+          <p:nvPr/>
+        </p:nvSpPr>
+        <p:spPr>
+          <a:xfrm>
+            <a:off x="9747504" y="1417320"/>
+            <a:ext cx="1417320" cy="1024128"/>
+          </a:xfrm>
+          <a:prstGeom prst="rect">
+            <a:avLst/>
+          </a:prstGeom>
+          <a:solidFill>
+            <a:srgbClr val="D58A36"/>
+          </a:solidFill>
+          <a:ln>
+            <a:noFill/>
+          </a:ln>
+        </p:spPr>
+      </p:sp>
+      <p:sp>
+        <p:nvSpPr>
+          <p:cNvPr id="30" name="card-text-29"/>
+          <p:cNvSpPr/>
+          <p:nvPr/>
+        </p:nvSpPr>
+        <p:spPr>
+          <a:xfrm>
+            <a:off x="9838944" y="1508760"/>
+            <a:ext cx="1234440" cy="841248"/>
+          </a:xfrm>
+          <a:prstGeom prst="rect">
+            <a:avLst/>
+          </a:prstGeom>
+          <a:noFill/>
+          <a:ln>
+            <a:noFill/>
+          </a:ln>
+        </p:spPr>
+        <p:txBody>
+          <a:bodyPr wrap="square" rtlCol="0"/>
+          <a:lstStyle/>
+          <a:p>
+            <a:pPr lvl="0">
+              <a:buNone/>
+            </a:pPr>
+            <a:r>
+              <a:rPr lang="en-US" sz="1400" b="1">
+                <a:solidFill>
+                  <a:srgbClr val="FFFFFF"/>
+                </a:solidFill>
+                <a:latin typeface="Aptos"/>
+              </a:rPr>
+              <a:t>HbA1c +1</a:t>
+            </a:r>
+            <a:endParaRPr lang="en-US" sz="1400"/>
+          </a:p>
+          <a:p>
+            <a:pPr lvl="0">
+              <a:buNone/>
+            </a:pPr>
+            <a:r>
+              <a:rPr lang="en-US" sz="900">
+                <a:solidFill>
+                  <a:srgbClr val="EAF4F5"/>
+                </a:solidFill>
+                <a:latin typeface="Aptos"/>
+              </a:rPr>
+              <a:t>80.26% cov.</a:t>
+            </a:r>
+            <a:endParaRPr lang="en-US" sz="900"/>
           </a:p>
         </p:txBody>
       </p:sp>
@@ -872,8 +1675,8 @@
         </p:nvSpPr>
         <p:spPr>
           <a:xfrm>
-            <a:off x="749808" y="1261872"/>
-            <a:ext cx="10698480" cy="4800600"/>
+            <a:off x="658368" y="1261872"/>
+            <a:ext cx="3886200" cy="4800600"/>
           </a:xfrm>
           <a:prstGeom prst="rect">
             <a:avLst/>
@@ -891,7 +1694,7 @@
               <a:buChar char="•"/>
             </a:pPr>
             <a:r>
-              <a:rPr lang="en-US" sz="1700">
+              <a:rPr lang="en-US" sz="1500">
                 <a:solidFill>
                   <a:srgbClr val="26364D"/>
                 </a:solidFill>
@@ -899,14 +1702,14 @@
               </a:rPr>
               <a:t>22 synthetic episodes across 12 test patients</a:t>
             </a:r>
-            <a:endParaRPr lang="en-US" sz="1700"/>
+            <a:endParaRPr lang="en-US" sz="1500"/>
           </a:p>
           <a:p>
             <a:pPr lvl="0">
               <a:buChar char="•"/>
             </a:pPr>
             <a:r>
-              <a:rPr lang="en-US" sz="1700">
+              <a:rPr lang="en-US" sz="1500">
                 <a:solidFill>
                   <a:srgbClr val="26364D"/>
                 </a:solidFill>
@@ -914,14 +1717,14 @@
               </a:rPr>
               <a:t>At threshold 0.10: episode sensitivity 22.7%, median lead 70 min</a:t>
             </a:r>
-            <a:endParaRPr lang="en-US" sz="1700"/>
+            <a:endParaRPr lang="en-US" sz="1500"/>
           </a:p>
           <a:p>
             <a:pPr lvl="0">
               <a:buChar char="•"/>
             </a:pPr>
             <a:r>
-              <a:rPr lang="en-US" sz="1700">
+              <a:rPr lang="en-US" sz="1500">
                 <a:solidFill>
                   <a:srgbClr val="26364D"/>
                 </a:solidFill>
@@ -929,14 +1732,14 @@
               </a:rPr>
               <a:t>At threshold 0.20: episode sensitivity 18.2%, 0.133 false alerts/patient-day</a:t>
             </a:r>
-            <a:endParaRPr lang="en-US" sz="1700"/>
+            <a:endParaRPr lang="en-US" sz="1500"/>
           </a:p>
           <a:p>
             <a:pPr lvl="0">
               <a:buChar char="•"/>
             </a:pPr>
             <a:r>
-              <a:rPr lang="en-US" sz="1700">
+              <a:rPr lang="en-US" sz="1500">
                 <a:solidFill>
                   <a:srgbClr val="26364D"/>
                 </a:solidFill>
@@ -944,7 +1747,389 @@
               </a:rPr>
               <a:t>Synthetic alert metrics are not clinical performance</a:t>
             </a:r>
-            <a:endParaRPr lang="en-US" sz="1700"/>
+            <a:endParaRPr lang="en-US" sz="1500"/>
+          </a:p>
+        </p:txBody>
+      </p:sp>
+      <p:sp>
+        <p:nvSpPr>
+          <p:cNvPr id="20" name="card-20"/>
+          <p:cNvSpPr/>
+          <p:nvPr/>
+        </p:nvSpPr>
+        <p:spPr>
+          <a:xfrm>
+            <a:off x="4892040" y="1417320"/>
+            <a:ext cx="1417320" cy="1024128"/>
+          </a:xfrm>
+          <a:prstGeom prst="rect">
+            <a:avLst/>
+          </a:prstGeom>
+          <a:solidFill>
+            <a:srgbClr val="159B9A"/>
+          </a:solidFill>
+          <a:ln>
+            <a:noFill/>
+          </a:ln>
+        </p:spPr>
+      </p:sp>
+      <p:sp>
+        <p:nvSpPr>
+          <p:cNvPr id="21" name="card-text-20"/>
+          <p:cNvSpPr/>
+          <p:nvPr/>
+        </p:nvSpPr>
+        <p:spPr>
+          <a:xfrm>
+            <a:off x="4983480" y="1508760"/>
+            <a:ext cx="1234440" cy="841248"/>
+          </a:xfrm>
+          <a:prstGeom prst="rect">
+            <a:avLst/>
+          </a:prstGeom>
+          <a:noFill/>
+          <a:ln>
+            <a:noFill/>
+          </a:ln>
+        </p:spPr>
+        <p:txBody>
+          <a:bodyPr wrap="square" rtlCol="0"/>
+          <a:lstStyle/>
+          <a:p>
+            <a:pPr lvl="0">
+              <a:buNone/>
+            </a:pPr>
+            <a:r>
+              <a:rPr lang="en-US" sz="1400" b="1">
+                <a:solidFill>
+                  <a:srgbClr val="FFFFFF"/>
+                </a:solidFill>
+                <a:latin typeface="Aptos"/>
+              </a:rPr>
+              <a:t>0.10</a:t>
+            </a:r>
+            <a:endParaRPr lang="en-US" sz="1400"/>
+          </a:p>
+          <a:p>
+            <a:pPr lvl="0">
+              <a:buNone/>
+            </a:pPr>
+            <a:r>
+              <a:rPr lang="en-US" sz="900">
+                <a:solidFill>
+                  <a:srgbClr val="EAF4F5"/>
+                </a:solidFill>
+                <a:latin typeface="Aptos"/>
+              </a:rPr>
+              <a:t>more recall</a:t>
+            </a:r>
+            <a:endParaRPr lang="en-US" sz="900"/>
+          </a:p>
+        </p:txBody>
+      </p:sp>
+      <p:sp>
+        <p:nvSpPr>
+          <p:cNvPr id="22" name="arrow-22"/>
+          <p:cNvSpPr/>
+          <p:nvPr/>
+        </p:nvSpPr>
+        <p:spPr>
+          <a:xfrm>
+            <a:off x="6318504" y="1700784"/>
+            <a:ext cx="260000" cy="430000"/>
+          </a:xfrm>
+          <a:prstGeom prst="rect">
+            <a:avLst/>
+          </a:prstGeom>
+          <a:noFill/>
+          <a:ln>
+            <a:noFill/>
+          </a:ln>
+        </p:spPr>
+        <p:txBody>
+          <a:bodyPr wrap="square" rtlCol="0"/>
+          <a:lstStyle/>
+          <a:p>
+            <a:pPr lvl="0">
+              <a:buNone/>
+            </a:pPr>
+            <a:r>
+              <a:rPr lang="en-US" sz="2200" b="1">
+                <a:solidFill>
+                  <a:srgbClr val="7667E8"/>
+                </a:solidFill>
+                <a:latin typeface="Aptos"/>
+              </a:rPr>
+              <a:t>→</a:t>
+            </a:r>
+            <a:endParaRPr lang="en-US" sz="2200"/>
+          </a:p>
+        </p:txBody>
+      </p:sp>
+      <p:sp>
+        <p:nvSpPr>
+          <p:cNvPr id="23" name="card-23"/>
+          <p:cNvSpPr/>
+          <p:nvPr/>
+        </p:nvSpPr>
+        <p:spPr>
+          <a:xfrm>
+            <a:off x="6510528" y="1417320"/>
+            <a:ext cx="1417320" cy="1024128"/>
+          </a:xfrm>
+          <a:prstGeom prst="rect">
+            <a:avLst/>
+          </a:prstGeom>
+          <a:solidFill>
+            <a:srgbClr val="7667E8"/>
+          </a:solidFill>
+          <a:ln>
+            <a:noFill/>
+          </a:ln>
+        </p:spPr>
+      </p:sp>
+      <p:sp>
+        <p:nvSpPr>
+          <p:cNvPr id="24" name="card-text-23"/>
+          <p:cNvSpPr/>
+          <p:nvPr/>
+        </p:nvSpPr>
+        <p:spPr>
+          <a:xfrm>
+            <a:off x="6601968" y="1508760"/>
+            <a:ext cx="1234440" cy="841248"/>
+          </a:xfrm>
+          <a:prstGeom prst="rect">
+            <a:avLst/>
+          </a:prstGeom>
+          <a:noFill/>
+          <a:ln>
+            <a:noFill/>
+          </a:ln>
+        </p:spPr>
+        <p:txBody>
+          <a:bodyPr wrap="square" rtlCol="0"/>
+          <a:lstStyle/>
+          <a:p>
+            <a:pPr lvl="0">
+              <a:buNone/>
+            </a:pPr>
+            <a:r>
+              <a:rPr lang="en-US" sz="1400" b="1">
+                <a:solidFill>
+                  <a:srgbClr val="FFFFFF"/>
+                </a:solidFill>
+                <a:latin typeface="Aptos"/>
+              </a:rPr>
+              <a:t>0.20</a:t>
+            </a:r>
+            <a:endParaRPr lang="en-US" sz="1400"/>
+          </a:p>
+          <a:p>
+            <a:pPr lvl="0">
+              <a:buNone/>
+            </a:pPr>
+            <a:r>
+              <a:rPr lang="en-US" sz="900">
+                <a:solidFill>
+                  <a:srgbClr val="EAF4F5"/>
+                </a:solidFill>
+                <a:latin typeface="Aptos"/>
+              </a:rPr>
+              <a:t>balanced view</a:t>
+            </a:r>
+            <a:endParaRPr lang="en-US" sz="900"/>
+          </a:p>
+        </p:txBody>
+      </p:sp>
+      <p:sp>
+        <p:nvSpPr>
+          <p:cNvPr id="25" name="arrow-25"/>
+          <p:cNvSpPr/>
+          <p:nvPr/>
+        </p:nvSpPr>
+        <p:spPr>
+          <a:xfrm>
+            <a:off x="7936992" y="1700784"/>
+            <a:ext cx="260000" cy="430000"/>
+          </a:xfrm>
+          <a:prstGeom prst="rect">
+            <a:avLst/>
+          </a:prstGeom>
+          <a:noFill/>
+          <a:ln>
+            <a:noFill/>
+          </a:ln>
+        </p:spPr>
+        <p:txBody>
+          <a:bodyPr wrap="square" rtlCol="0"/>
+          <a:lstStyle/>
+          <a:p>
+            <a:pPr lvl="0">
+              <a:buNone/>
+            </a:pPr>
+            <a:r>
+              <a:rPr lang="en-US" sz="2200" b="1">
+                <a:solidFill>
+                  <a:srgbClr val="7667E8"/>
+                </a:solidFill>
+                <a:latin typeface="Aptos"/>
+              </a:rPr>
+              <a:t>→</a:t>
+            </a:r>
+            <a:endParaRPr lang="en-US" sz="2200"/>
+          </a:p>
+        </p:txBody>
+      </p:sp>
+      <p:sp>
+        <p:nvSpPr>
+          <p:cNvPr id="26" name="card-26"/>
+          <p:cNvSpPr/>
+          <p:nvPr/>
+        </p:nvSpPr>
+        <p:spPr>
+          <a:xfrm>
+            <a:off x="8129016" y="1417320"/>
+            <a:ext cx="1417320" cy="1024128"/>
+          </a:xfrm>
+          <a:prstGeom prst="rect">
+            <a:avLst/>
+          </a:prstGeom>
+          <a:solidFill>
+            <a:srgbClr val="14253D"/>
+          </a:solidFill>
+          <a:ln>
+            <a:noFill/>
+          </a:ln>
+        </p:spPr>
+      </p:sp>
+      <p:sp>
+        <p:nvSpPr>
+          <p:cNvPr id="27" name="card-text-26"/>
+          <p:cNvSpPr/>
+          <p:nvPr/>
+        </p:nvSpPr>
+        <p:spPr>
+          <a:xfrm>
+            <a:off x="8220456" y="1508760"/>
+            <a:ext cx="1234440" cy="841248"/>
+          </a:xfrm>
+          <a:prstGeom prst="rect">
+            <a:avLst/>
+          </a:prstGeom>
+          <a:noFill/>
+          <a:ln>
+            <a:noFill/>
+          </a:ln>
+        </p:spPr>
+        <p:txBody>
+          <a:bodyPr wrap="square" rtlCol="0"/>
+          <a:lstStyle/>
+          <a:p>
+            <a:pPr lvl="0">
+              <a:buNone/>
+            </a:pPr>
+            <a:r>
+              <a:rPr lang="en-US" sz="1400" b="1">
+                <a:solidFill>
+                  <a:srgbClr val="FFFFFF"/>
+                </a:solidFill>
+                <a:latin typeface="Aptos"/>
+              </a:rPr>
+              <a:t>0.50</a:t>
+            </a:r>
+            <a:endParaRPr lang="en-US" sz="1400"/>
+          </a:p>
+          <a:p>
+            <a:pPr lvl="0">
+              <a:buNone/>
+            </a:pPr>
+            <a:r>
+              <a:rPr lang="en-US" sz="900">
+                <a:solidFill>
+                  <a:srgbClr val="EAF4F5"/>
+                </a:solidFill>
+                <a:latin typeface="Aptos"/>
+              </a:rPr>
+              <a:t>few alerts</a:t>
+            </a:r>
+            <a:endParaRPr lang="en-US" sz="900"/>
+          </a:p>
+        </p:txBody>
+      </p:sp>
+      <p:sp>
+        <p:nvSpPr>
+          <p:cNvPr id="28" name="card-28"/>
+          <p:cNvSpPr/>
+          <p:nvPr/>
+        </p:nvSpPr>
+        <p:spPr>
+          <a:xfrm>
+            <a:off x="4892040" y="3017520"/>
+            <a:ext cx="6309360" cy="1024128"/>
+          </a:xfrm>
+          <a:prstGeom prst="rect">
+            <a:avLst/>
+          </a:prstGeom>
+          <a:solidFill>
+            <a:srgbClr val="14253D"/>
+          </a:solidFill>
+          <a:ln>
+            <a:noFill/>
+          </a:ln>
+        </p:spPr>
+      </p:sp>
+      <p:sp>
+        <p:nvSpPr>
+          <p:cNvPr id="29" name="card-text-28"/>
+          <p:cNvSpPr/>
+          <p:nvPr/>
+        </p:nvSpPr>
+        <p:spPr>
+          <a:xfrm>
+            <a:off x="4983480" y="3108960"/>
+            <a:ext cx="6126480" cy="841248"/>
+          </a:xfrm>
+          <a:prstGeom prst="rect">
+            <a:avLst/>
+          </a:prstGeom>
+          <a:noFill/>
+          <a:ln>
+            <a:noFill/>
+          </a:ln>
+        </p:spPr>
+        <p:txBody>
+          <a:bodyPr wrap="square" rtlCol="0"/>
+          <a:lstStyle/>
+          <a:p>
+            <a:pPr lvl="0">
+              <a:buNone/>
+            </a:pPr>
+            <a:r>
+              <a:rPr lang="en-US" sz="1400" b="1">
+                <a:solidFill>
+                  <a:srgbClr val="FFFFFF"/>
+                </a:solidFill>
+                <a:latin typeface="Aptos"/>
+              </a:rPr>
+              <a:t>TRADE-OFF</a:t>
+            </a:r>
+            <a:endParaRPr lang="en-US" sz="1400"/>
+          </a:p>
+          <a:p>
+            <a:pPr lvl="0">
+              <a:buNone/>
+            </a:pPr>
+            <a:r>
+              <a:rPr lang="en-US" sz="900">
+                <a:solidFill>
+                  <a:srgbClr val="EAF4F5"/>
+                </a:solidFill>
+                <a:latin typeface="Aptos"/>
+              </a:rPr>
+              <a:t>Threshold changes episode sensitivity and false-alert burden; no clinical threshold claim.</a:t>
+            </a:r>
+            <a:endParaRPr lang="en-US" sz="900"/>
           </a:p>
         </p:txBody>
       </p:sp>
@@ -1103,8 +2288,8 @@
         </p:nvSpPr>
         <p:spPr>
           <a:xfrm>
-            <a:off x="749808" y="1261872"/>
-            <a:ext cx="10698480" cy="4800600"/>
+            <a:off x="658368" y="1261872"/>
+            <a:ext cx="3886200" cy="4800600"/>
           </a:xfrm>
           <a:prstGeom prst="rect">
             <a:avLst/>
@@ -1122,7 +2307,7 @@
               <a:buChar char="•"/>
             </a:pPr>
             <a:r>
-              <a:rPr lang="en-US" sz="1700">
+              <a:rPr lang="en-US" sz="1500">
                 <a:solidFill>
                   <a:srgbClr val="26364D"/>
                 </a:solidFill>
@@ -1130,14 +2315,14 @@
               </a:rPr>
               <a:t>Show synthetic/non-clinical warning</a:t>
             </a:r>
-            <a:endParaRPr lang="en-US" sz="1700"/>
+            <a:endParaRPr lang="en-US" sz="1500"/>
           </a:p>
           <a:p>
             <a:pPr lvl="0">
               <a:buChar char="•"/>
             </a:pPr>
             <a:r>
-              <a:rPr lang="en-US" sz="1700">
+              <a:rPr lang="en-US" sz="1500">
                 <a:solidFill>
                   <a:srgbClr val="26364D"/>
                 </a:solidFill>
@@ -1145,14 +2330,14 @@
               </a:rPr>
               <a:t>Select held-out record and replay +5 minutes</a:t>
             </a:r>
-            <a:endParaRPr lang="en-US" sz="1700"/>
+            <a:endParaRPr lang="en-US" sz="1500"/>
           </a:p>
           <a:p>
             <a:pPr lvl="0">
               <a:buChar char="•"/>
             </a:pPr>
             <a:r>
-              <a:rPr lang="en-US" sz="1700">
+              <a:rPr lang="en-US" sz="1500">
                 <a:solidFill>
                   <a:srgbClr val="26364D"/>
                 </a:solidFill>
@@ -1160,14 +2345,14 @@
               </a:rPr>
               <a:t>Inspect heads and intervals</a:t>
             </a:r>
-            <a:endParaRPr lang="en-US" sz="1700"/>
+            <a:endParaRPr lang="en-US" sz="1500"/>
           </a:p>
           <a:p>
             <a:pPr lvl="0">
               <a:buChar char="•"/>
             </a:pPr>
             <a:r>
-              <a:rPr lang="en-US" sz="1700">
+              <a:rPr lang="en-US" sz="1500">
                 <a:solidFill>
                   <a:srgbClr val="26364D"/>
                 </a:solidFill>
@@ -1175,14 +2360,14 @@
               </a:rPr>
               <a:t>Enable dropout and show abstention</a:t>
             </a:r>
-            <a:endParaRPr lang="en-US" sz="1700"/>
+            <a:endParaRPr lang="en-US" sz="1500"/>
           </a:p>
           <a:p>
             <a:pPr lvl="0">
               <a:buChar char="•"/>
             </a:pPr>
             <a:r>
-              <a:rPr lang="en-US" sz="1700">
+              <a:rPr lang="en-US" sz="1500">
                 <a:solidFill>
                   <a:srgbClr val="26364D"/>
                 </a:solidFill>
@@ -1190,7 +2375,428 @@
               </a:rPr>
               <a:t>Review scenario disclaimer and measured evidence</a:t>
             </a:r>
-            <a:endParaRPr lang="en-US" sz="1700"/>
+            <a:endParaRPr lang="en-US" sz="1500"/>
+          </a:p>
+        </p:txBody>
+      </p:sp>
+      <p:sp>
+        <p:nvSpPr>
+          <p:cNvPr id="20" name="card-20"/>
+          <p:cNvSpPr/>
+          <p:nvPr/>
+        </p:nvSpPr>
+        <p:spPr>
+          <a:xfrm>
+            <a:off x="4892040" y="1417320"/>
+            <a:ext cx="1417320" cy="1024128"/>
+          </a:xfrm>
+          <a:prstGeom prst="rect">
+            <a:avLst/>
+          </a:prstGeom>
+          <a:solidFill>
+            <a:srgbClr val="159B9A"/>
+          </a:solidFill>
+          <a:ln>
+            <a:noFill/>
+          </a:ln>
+        </p:spPr>
+      </p:sp>
+      <p:sp>
+        <p:nvSpPr>
+          <p:cNvPr id="21" name="card-text-20"/>
+          <p:cNvSpPr/>
+          <p:nvPr/>
+        </p:nvSpPr>
+        <p:spPr>
+          <a:xfrm>
+            <a:off x="4983480" y="1508760"/>
+            <a:ext cx="1234440" cy="841248"/>
+          </a:xfrm>
+          <a:prstGeom prst="rect">
+            <a:avLst/>
+          </a:prstGeom>
+          <a:noFill/>
+          <a:ln>
+            <a:noFill/>
+          </a:ln>
+        </p:spPr>
+        <p:txBody>
+          <a:bodyPr wrap="square" rtlCol="0"/>
+          <a:lstStyle/>
+          <a:p>
+            <a:pPr lvl="0">
+              <a:buNone/>
+            </a:pPr>
+            <a:r>
+              <a:rPr lang="en-US" sz="1400" b="1">
+                <a:solidFill>
+                  <a:srgbClr val="FFFFFF"/>
+                </a:solidFill>
+                <a:latin typeface="Aptos"/>
+              </a:rPr>
+              <a:t>WARNING</a:t>
+            </a:r>
+            <a:endParaRPr lang="en-US" sz="1400"/>
+          </a:p>
+          <a:p>
+            <a:pPr lvl="0">
+              <a:buNone/>
+            </a:pPr>
+            <a:r>
+              <a:rPr lang="en-US" sz="900">
+                <a:solidFill>
+                  <a:srgbClr val="EAF4F5"/>
+                </a:solidFill>
+                <a:latin typeface="Aptos"/>
+              </a:rPr>
+              <a:t>synthetic</a:t>
+            </a:r>
+            <a:endParaRPr lang="en-US" sz="900"/>
+          </a:p>
+        </p:txBody>
+      </p:sp>
+      <p:sp>
+        <p:nvSpPr>
+          <p:cNvPr id="22" name="arrow-22"/>
+          <p:cNvSpPr/>
+          <p:nvPr/>
+        </p:nvSpPr>
+        <p:spPr>
+          <a:xfrm>
+            <a:off x="6318504" y="1700784"/>
+            <a:ext cx="260000" cy="430000"/>
+          </a:xfrm>
+          <a:prstGeom prst="rect">
+            <a:avLst/>
+          </a:prstGeom>
+          <a:noFill/>
+          <a:ln>
+            <a:noFill/>
+          </a:ln>
+        </p:spPr>
+        <p:txBody>
+          <a:bodyPr wrap="square" rtlCol="0"/>
+          <a:lstStyle/>
+          <a:p>
+            <a:pPr lvl="0">
+              <a:buNone/>
+            </a:pPr>
+            <a:r>
+              <a:rPr lang="en-US" sz="2200" b="1">
+                <a:solidFill>
+                  <a:srgbClr val="7667E8"/>
+                </a:solidFill>
+                <a:latin typeface="Aptos"/>
+              </a:rPr>
+              <a:t>→</a:t>
+            </a:r>
+            <a:endParaRPr lang="en-US" sz="2200"/>
+          </a:p>
+        </p:txBody>
+      </p:sp>
+      <p:sp>
+        <p:nvSpPr>
+          <p:cNvPr id="23" name="card-23"/>
+          <p:cNvSpPr/>
+          <p:nvPr/>
+        </p:nvSpPr>
+        <p:spPr>
+          <a:xfrm>
+            <a:off x="6510528" y="1417320"/>
+            <a:ext cx="1417320" cy="1024128"/>
+          </a:xfrm>
+          <a:prstGeom prst="rect">
+            <a:avLst/>
+          </a:prstGeom>
+          <a:solidFill>
+            <a:srgbClr val="7667E8"/>
+          </a:solidFill>
+          <a:ln>
+            <a:noFill/>
+          </a:ln>
+        </p:spPr>
+      </p:sp>
+      <p:sp>
+        <p:nvSpPr>
+          <p:cNvPr id="24" name="card-text-23"/>
+          <p:cNvSpPr/>
+          <p:nvPr/>
+        </p:nvSpPr>
+        <p:spPr>
+          <a:xfrm>
+            <a:off x="6601968" y="1508760"/>
+            <a:ext cx="1234440" cy="841248"/>
+          </a:xfrm>
+          <a:prstGeom prst="rect">
+            <a:avLst/>
+          </a:prstGeom>
+          <a:noFill/>
+          <a:ln>
+            <a:noFill/>
+          </a:ln>
+        </p:spPr>
+        <p:txBody>
+          <a:bodyPr wrap="square" rtlCol="0"/>
+          <a:lstStyle/>
+          <a:p>
+            <a:pPr lvl="0">
+              <a:buNone/>
+            </a:pPr>
+            <a:r>
+              <a:rPr lang="en-US" sz="1400" b="1">
+                <a:solidFill>
+                  <a:srgbClr val="FFFFFF"/>
+                </a:solidFill>
+                <a:latin typeface="Aptos"/>
+              </a:rPr>
+              <a:t>REPLAY</a:t>
+            </a:r>
+            <a:endParaRPr lang="en-US" sz="1400"/>
+          </a:p>
+          <a:p>
+            <a:pPr lvl="0">
+              <a:buNone/>
+            </a:pPr>
+            <a:r>
+              <a:rPr lang="en-US" sz="900">
+                <a:solidFill>
+                  <a:srgbClr val="EAF4F5"/>
+                </a:solidFill>
+                <a:latin typeface="Aptos"/>
+              </a:rPr>
+              <a:t>clock</a:t>
+            </a:r>
+            <a:endParaRPr lang="en-US" sz="900"/>
+          </a:p>
+        </p:txBody>
+      </p:sp>
+      <p:sp>
+        <p:nvSpPr>
+          <p:cNvPr id="25" name="arrow-25"/>
+          <p:cNvSpPr/>
+          <p:nvPr/>
+        </p:nvSpPr>
+        <p:spPr>
+          <a:xfrm>
+            <a:off x="7936992" y="1700784"/>
+            <a:ext cx="260000" cy="430000"/>
+          </a:xfrm>
+          <a:prstGeom prst="rect">
+            <a:avLst/>
+          </a:prstGeom>
+          <a:noFill/>
+          <a:ln>
+            <a:noFill/>
+          </a:ln>
+        </p:spPr>
+        <p:txBody>
+          <a:bodyPr wrap="square" rtlCol="0"/>
+          <a:lstStyle/>
+          <a:p>
+            <a:pPr lvl="0">
+              <a:buNone/>
+            </a:pPr>
+            <a:r>
+              <a:rPr lang="en-US" sz="2200" b="1">
+                <a:solidFill>
+                  <a:srgbClr val="7667E8"/>
+                </a:solidFill>
+                <a:latin typeface="Aptos"/>
+              </a:rPr>
+              <a:t>→</a:t>
+            </a:r>
+            <a:endParaRPr lang="en-US" sz="2200"/>
+          </a:p>
+        </p:txBody>
+      </p:sp>
+      <p:sp>
+        <p:nvSpPr>
+          <p:cNvPr id="26" name="card-26"/>
+          <p:cNvSpPr/>
+          <p:nvPr/>
+        </p:nvSpPr>
+        <p:spPr>
+          <a:xfrm>
+            <a:off x="8129016" y="1417320"/>
+            <a:ext cx="1417320" cy="1024128"/>
+          </a:xfrm>
+          <a:prstGeom prst="rect">
+            <a:avLst/>
+          </a:prstGeom>
+          <a:solidFill>
+            <a:srgbClr val="D58A36"/>
+          </a:solidFill>
+          <a:ln>
+            <a:noFill/>
+          </a:ln>
+        </p:spPr>
+      </p:sp>
+      <p:sp>
+        <p:nvSpPr>
+          <p:cNvPr id="27" name="card-text-26"/>
+          <p:cNvSpPr/>
+          <p:nvPr/>
+        </p:nvSpPr>
+        <p:spPr>
+          <a:xfrm>
+            <a:off x="8220456" y="1508760"/>
+            <a:ext cx="1234440" cy="841248"/>
+          </a:xfrm>
+          <a:prstGeom prst="rect">
+            <a:avLst/>
+          </a:prstGeom>
+          <a:noFill/>
+          <a:ln>
+            <a:noFill/>
+          </a:ln>
+        </p:spPr>
+        <p:txBody>
+          <a:bodyPr wrap="square" rtlCol="0"/>
+          <a:lstStyle/>
+          <a:p>
+            <a:pPr lvl="0">
+              <a:buNone/>
+            </a:pPr>
+            <a:r>
+              <a:rPr lang="en-US" sz="1400" b="1">
+                <a:solidFill>
+                  <a:srgbClr val="FFFFFF"/>
+                </a:solidFill>
+                <a:latin typeface="Aptos"/>
+              </a:rPr>
+              <a:t>DROPOUT</a:t>
+            </a:r>
+            <a:endParaRPr lang="en-US" sz="1400"/>
+          </a:p>
+          <a:p>
+            <a:pPr lvl="0">
+              <a:buNone/>
+            </a:pPr>
+            <a:r>
+              <a:rPr lang="en-US" sz="900">
+                <a:solidFill>
+                  <a:srgbClr val="EAF4F5"/>
+                </a:solidFill>
+                <a:latin typeface="Aptos"/>
+              </a:rPr>
+              <a:t>abstain</a:t>
+            </a:r>
+            <a:endParaRPr lang="en-US" sz="900"/>
+          </a:p>
+        </p:txBody>
+      </p:sp>
+      <p:sp>
+        <p:nvSpPr>
+          <p:cNvPr id="28" name="arrow-28"/>
+          <p:cNvSpPr/>
+          <p:nvPr/>
+        </p:nvSpPr>
+        <p:spPr>
+          <a:xfrm>
+            <a:off x="9555480" y="1700784"/>
+            <a:ext cx="260000" cy="430000"/>
+          </a:xfrm>
+          <a:prstGeom prst="rect">
+            <a:avLst/>
+          </a:prstGeom>
+          <a:noFill/>
+          <a:ln>
+            <a:noFill/>
+          </a:ln>
+        </p:spPr>
+        <p:txBody>
+          <a:bodyPr wrap="square" rtlCol="0"/>
+          <a:lstStyle/>
+          <a:p>
+            <a:pPr lvl="0">
+              <a:buNone/>
+            </a:pPr>
+            <a:r>
+              <a:rPr lang="en-US" sz="2200" b="1">
+                <a:solidFill>
+                  <a:srgbClr val="7667E8"/>
+                </a:solidFill>
+                <a:latin typeface="Aptos"/>
+              </a:rPr>
+              <a:t>→</a:t>
+            </a:r>
+            <a:endParaRPr lang="en-US" sz="2200"/>
+          </a:p>
+        </p:txBody>
+      </p:sp>
+      <p:sp>
+        <p:nvSpPr>
+          <p:cNvPr id="29" name="card-29"/>
+          <p:cNvSpPr/>
+          <p:nvPr/>
+        </p:nvSpPr>
+        <p:spPr>
+          <a:xfrm>
+            <a:off x="9747504" y="1417320"/>
+            <a:ext cx="1417320" cy="1024128"/>
+          </a:xfrm>
+          <a:prstGeom prst="rect">
+            <a:avLst/>
+          </a:prstGeom>
+          <a:solidFill>
+            <a:srgbClr val="159B9A"/>
+          </a:solidFill>
+          <a:ln>
+            <a:noFill/>
+          </a:ln>
+        </p:spPr>
+      </p:sp>
+      <p:sp>
+        <p:nvSpPr>
+          <p:cNvPr id="30" name="card-text-29"/>
+          <p:cNvSpPr/>
+          <p:nvPr/>
+        </p:nvSpPr>
+        <p:spPr>
+          <a:xfrm>
+            <a:off x="9838944" y="1508760"/>
+            <a:ext cx="1234440" cy="841248"/>
+          </a:xfrm>
+          <a:prstGeom prst="rect">
+            <a:avLst/>
+          </a:prstGeom>
+          <a:noFill/>
+          <a:ln>
+            <a:noFill/>
+          </a:ln>
+        </p:spPr>
+        <p:txBody>
+          <a:bodyPr wrap="square" rtlCol="0"/>
+          <a:lstStyle/>
+          <a:p>
+            <a:pPr lvl="0">
+              <a:buNone/>
+            </a:pPr>
+            <a:r>
+              <a:rPr lang="en-US" sz="1400" b="1">
+                <a:solidFill>
+                  <a:srgbClr val="FFFFFF"/>
+                </a:solidFill>
+                <a:latin typeface="Aptos"/>
+              </a:rPr>
+              <a:t>EVIDENCE</a:t>
+            </a:r>
+            <a:endParaRPr lang="en-US" sz="1400"/>
+          </a:p>
+          <a:p>
+            <a:pPr lvl="0">
+              <a:buNone/>
+            </a:pPr>
+            <a:r>
+              <a:rPr lang="en-US" sz="900">
+                <a:solidFill>
+                  <a:srgbClr val="EAF4F5"/>
+                </a:solidFill>
+                <a:latin typeface="Aptos"/>
+              </a:rPr>
+              <a:t>metrics</a:t>
+            </a:r>
+            <a:endParaRPr lang="en-US" sz="900"/>
           </a:p>
         </p:txBody>
       </p:sp>
@@ -1349,8 +2955,8 @@
         </p:nvSpPr>
         <p:spPr>
           <a:xfrm>
-            <a:off x="749808" y="1261872"/>
-            <a:ext cx="10698480" cy="4800600"/>
+            <a:off x="658368" y="1261872"/>
+            <a:ext cx="3886200" cy="4800600"/>
           </a:xfrm>
           <a:prstGeom prst="rect">
             <a:avLst/>
@@ -1368,7 +2974,7 @@
               <a:buChar char="•"/>
             </a:pPr>
             <a:r>
-              <a:rPr lang="en-US" sz="1700">
+              <a:rPr lang="en-US" sz="1500">
                 <a:solidFill>
                   <a:srgbClr val="26364D"/>
                 </a:solidFill>
@@ -1376,14 +2982,14 @@
               </a:rPr>
               <a:t>No diagnosis, dosing, medication change, or treatment advice</a:t>
             </a:r>
-            <a:endParaRPr lang="en-US" sz="1700"/>
+            <a:endParaRPr lang="en-US" sz="1500"/>
           </a:p>
           <a:p>
             <a:pPr lvl="0">
               <a:buChar char="•"/>
             </a:pPr>
             <a:r>
-              <a:rPr lang="en-US" sz="1700">
+              <a:rPr lang="en-US" sz="1500">
                 <a:solidFill>
                   <a:srgbClr val="26364D"/>
                 </a:solidFill>
@@ -1391,14 +2997,14 @@
               </a:rPr>
               <a:t>Drivers are observed context, not causal attribution</a:t>
             </a:r>
-            <a:endParaRPr lang="en-US" sz="1700"/>
+            <a:endParaRPr lang="en-US" sz="1500"/>
           </a:p>
           <a:p>
             <a:pPr lvl="0">
               <a:buChar char="•"/>
             </a:pPr>
             <a:r>
-              <a:rPr lang="en-US" sz="1700">
+              <a:rPr lang="en-US" sz="1500">
                 <a:solidFill>
                   <a:srgbClr val="26364D"/>
                 </a:solidFill>
@@ -1406,14 +3012,14 @@
               </a:rPr>
               <a:t>Scenario controls are assumptions, not treatment effects</a:t>
             </a:r>
-            <a:endParaRPr lang="en-US" sz="1700"/>
+            <a:endParaRPr lang="en-US" sz="1500"/>
           </a:p>
           <a:p>
             <a:pPr lvl="0">
               <a:buChar char="•"/>
             </a:pPr>
             <a:r>
-              <a:rPr lang="en-US" sz="1700">
+              <a:rPr lang="en-US" sz="1500">
                 <a:solidFill>
                   <a:srgbClr val="26364D"/>
                 </a:solidFill>
@@ -1421,7 +3027,428 @@
               </a:rPr>
               <a:t>Not-ready, loading, error, and unavailable states are explicit</a:t>
             </a:r>
-            <a:endParaRPr lang="en-US" sz="1700"/>
+            <a:endParaRPr lang="en-US" sz="1500"/>
+          </a:p>
+        </p:txBody>
+      </p:sp>
+      <p:sp>
+        <p:nvSpPr>
+          <p:cNvPr id="20" name="card-20"/>
+          <p:cNvSpPr/>
+          <p:nvPr/>
+        </p:nvSpPr>
+        <p:spPr>
+          <a:xfrm>
+            <a:off x="4892040" y="1417320"/>
+            <a:ext cx="1417320" cy="1024128"/>
+          </a:xfrm>
+          <a:prstGeom prst="rect">
+            <a:avLst/>
+          </a:prstGeom>
+          <a:solidFill>
+            <a:srgbClr val="14253D"/>
+          </a:solidFill>
+          <a:ln>
+            <a:noFill/>
+          </a:ln>
+        </p:spPr>
+      </p:sp>
+      <p:sp>
+        <p:nvSpPr>
+          <p:cNvPr id="21" name="card-text-20"/>
+          <p:cNvSpPr/>
+          <p:nvPr/>
+        </p:nvSpPr>
+        <p:spPr>
+          <a:xfrm>
+            <a:off x="4983480" y="1508760"/>
+            <a:ext cx="1234440" cy="841248"/>
+          </a:xfrm>
+          <a:prstGeom prst="rect">
+            <a:avLst/>
+          </a:prstGeom>
+          <a:noFill/>
+          <a:ln>
+            <a:noFill/>
+          </a:ln>
+        </p:spPr>
+        <p:txBody>
+          <a:bodyPr wrap="square" rtlCol="0"/>
+          <a:lstStyle/>
+          <a:p>
+            <a:pPr lvl="0">
+              <a:buNone/>
+            </a:pPr>
+            <a:r>
+              <a:rPr lang="en-US" sz="1400" b="1">
+                <a:solidFill>
+                  <a:srgbClr val="FFFFFF"/>
+                </a:solidFill>
+                <a:latin typeface="Aptos"/>
+              </a:rPr>
+              <a:t>NO DOSING</a:t>
+            </a:r>
+            <a:endParaRPr lang="en-US" sz="1400"/>
+          </a:p>
+          <a:p>
+            <a:pPr lvl="0">
+              <a:buNone/>
+            </a:pPr>
+            <a:r>
+              <a:rPr lang="en-US" sz="900">
+                <a:solidFill>
+                  <a:srgbClr val="EAF4F5"/>
+                </a:solidFill>
+                <a:latin typeface="Aptos"/>
+              </a:rPr>
+              <a:t>no advice</a:t>
+            </a:r>
+            <a:endParaRPr lang="en-US" sz="900"/>
+          </a:p>
+        </p:txBody>
+      </p:sp>
+      <p:sp>
+        <p:nvSpPr>
+          <p:cNvPr id="22" name="arrow-22"/>
+          <p:cNvSpPr/>
+          <p:nvPr/>
+        </p:nvSpPr>
+        <p:spPr>
+          <a:xfrm>
+            <a:off x="6318504" y="1700784"/>
+            <a:ext cx="260000" cy="430000"/>
+          </a:xfrm>
+          <a:prstGeom prst="rect">
+            <a:avLst/>
+          </a:prstGeom>
+          <a:noFill/>
+          <a:ln>
+            <a:noFill/>
+          </a:ln>
+        </p:spPr>
+        <p:txBody>
+          <a:bodyPr wrap="square" rtlCol="0"/>
+          <a:lstStyle/>
+          <a:p>
+            <a:pPr lvl="0">
+              <a:buNone/>
+            </a:pPr>
+            <a:r>
+              <a:rPr lang="en-US" sz="2200" b="1">
+                <a:solidFill>
+                  <a:srgbClr val="7667E8"/>
+                </a:solidFill>
+                <a:latin typeface="Aptos"/>
+              </a:rPr>
+              <a:t>→</a:t>
+            </a:r>
+            <a:endParaRPr lang="en-US" sz="2200"/>
+          </a:p>
+        </p:txBody>
+      </p:sp>
+      <p:sp>
+        <p:nvSpPr>
+          <p:cNvPr id="23" name="card-23"/>
+          <p:cNvSpPr/>
+          <p:nvPr/>
+        </p:nvSpPr>
+        <p:spPr>
+          <a:xfrm>
+            <a:off x="6510528" y="1417320"/>
+            <a:ext cx="1417320" cy="1024128"/>
+          </a:xfrm>
+          <a:prstGeom prst="rect">
+            <a:avLst/>
+          </a:prstGeom>
+          <a:solidFill>
+            <a:srgbClr val="159B9A"/>
+          </a:solidFill>
+          <a:ln>
+            <a:noFill/>
+          </a:ln>
+        </p:spPr>
+      </p:sp>
+      <p:sp>
+        <p:nvSpPr>
+          <p:cNvPr id="24" name="card-text-23"/>
+          <p:cNvSpPr/>
+          <p:nvPr/>
+        </p:nvSpPr>
+        <p:spPr>
+          <a:xfrm>
+            <a:off x="6601968" y="1508760"/>
+            <a:ext cx="1234440" cy="841248"/>
+          </a:xfrm>
+          <a:prstGeom prst="rect">
+            <a:avLst/>
+          </a:prstGeom>
+          <a:noFill/>
+          <a:ln>
+            <a:noFill/>
+          </a:ln>
+        </p:spPr>
+        <p:txBody>
+          <a:bodyPr wrap="square" rtlCol="0"/>
+          <a:lstStyle/>
+          <a:p>
+            <a:pPr lvl="0">
+              <a:buNone/>
+            </a:pPr>
+            <a:r>
+              <a:rPr lang="en-US" sz="1400" b="1">
+                <a:solidFill>
+                  <a:srgbClr val="FFFFFF"/>
+                </a:solidFill>
+                <a:latin typeface="Aptos"/>
+              </a:rPr>
+              <a:t>PAST-ONLY</a:t>
+            </a:r>
+            <a:endParaRPr lang="en-US" sz="1400"/>
+          </a:p>
+          <a:p>
+            <a:pPr lvl="0">
+              <a:buNone/>
+            </a:pPr>
+            <a:r>
+              <a:rPr lang="en-US" sz="900">
+                <a:solidFill>
+                  <a:srgbClr val="EAF4F5"/>
+                </a:solidFill>
+                <a:latin typeface="Aptos"/>
+              </a:rPr>
+              <a:t>no leakage</a:t>
+            </a:r>
+            <a:endParaRPr lang="en-US" sz="900"/>
+          </a:p>
+        </p:txBody>
+      </p:sp>
+      <p:sp>
+        <p:nvSpPr>
+          <p:cNvPr id="25" name="arrow-25"/>
+          <p:cNvSpPr/>
+          <p:nvPr/>
+        </p:nvSpPr>
+        <p:spPr>
+          <a:xfrm>
+            <a:off x="7936992" y="1700784"/>
+            <a:ext cx="260000" cy="430000"/>
+          </a:xfrm>
+          <a:prstGeom prst="rect">
+            <a:avLst/>
+          </a:prstGeom>
+          <a:noFill/>
+          <a:ln>
+            <a:noFill/>
+          </a:ln>
+        </p:spPr>
+        <p:txBody>
+          <a:bodyPr wrap="square" rtlCol="0"/>
+          <a:lstStyle/>
+          <a:p>
+            <a:pPr lvl="0">
+              <a:buNone/>
+            </a:pPr>
+            <a:r>
+              <a:rPr lang="en-US" sz="2200" b="1">
+                <a:solidFill>
+                  <a:srgbClr val="7667E8"/>
+                </a:solidFill>
+                <a:latin typeface="Aptos"/>
+              </a:rPr>
+              <a:t>→</a:t>
+            </a:r>
+            <a:endParaRPr lang="en-US" sz="2200"/>
+          </a:p>
+        </p:txBody>
+      </p:sp>
+      <p:sp>
+        <p:nvSpPr>
+          <p:cNvPr id="26" name="card-26"/>
+          <p:cNvSpPr/>
+          <p:nvPr/>
+        </p:nvSpPr>
+        <p:spPr>
+          <a:xfrm>
+            <a:off x="8129016" y="1417320"/>
+            <a:ext cx="1417320" cy="1024128"/>
+          </a:xfrm>
+          <a:prstGeom prst="rect">
+            <a:avLst/>
+          </a:prstGeom>
+          <a:solidFill>
+            <a:srgbClr val="7667E8"/>
+          </a:solidFill>
+          <a:ln>
+            <a:noFill/>
+          </a:ln>
+        </p:spPr>
+      </p:sp>
+      <p:sp>
+        <p:nvSpPr>
+          <p:cNvPr id="27" name="card-text-26"/>
+          <p:cNvSpPr/>
+          <p:nvPr/>
+        </p:nvSpPr>
+        <p:spPr>
+          <a:xfrm>
+            <a:off x="8220456" y="1508760"/>
+            <a:ext cx="1234440" cy="841248"/>
+          </a:xfrm>
+          <a:prstGeom prst="rect">
+            <a:avLst/>
+          </a:prstGeom>
+          <a:noFill/>
+          <a:ln>
+            <a:noFill/>
+          </a:ln>
+        </p:spPr>
+        <p:txBody>
+          <a:bodyPr wrap="square" rtlCol="0"/>
+          <a:lstStyle/>
+          <a:p>
+            <a:pPr lvl="0">
+              <a:buNone/>
+            </a:pPr>
+            <a:r>
+              <a:rPr lang="en-US" sz="1400" b="1">
+                <a:solidFill>
+                  <a:srgbClr val="FFFFFF"/>
+                </a:solidFill>
+                <a:latin typeface="Aptos"/>
+              </a:rPr>
+              <a:t>NULL</a:t>
+            </a:r>
+            <a:endParaRPr lang="en-US" sz="1400"/>
+          </a:p>
+          <a:p>
+            <a:pPr lvl="0">
+              <a:buNone/>
+            </a:pPr>
+            <a:r>
+              <a:rPr lang="en-US" sz="900">
+                <a:solidFill>
+                  <a:srgbClr val="EAF4F5"/>
+                </a:solidFill>
+                <a:latin typeface="Aptos"/>
+              </a:rPr>
+              <a:t>no guessing</a:t>
+            </a:r>
+            <a:endParaRPr lang="en-US" sz="900"/>
+          </a:p>
+        </p:txBody>
+      </p:sp>
+      <p:sp>
+        <p:nvSpPr>
+          <p:cNvPr id="28" name="arrow-28"/>
+          <p:cNvSpPr/>
+          <p:nvPr/>
+        </p:nvSpPr>
+        <p:spPr>
+          <a:xfrm>
+            <a:off x="9555480" y="1700784"/>
+            <a:ext cx="260000" cy="430000"/>
+          </a:xfrm>
+          <a:prstGeom prst="rect">
+            <a:avLst/>
+          </a:prstGeom>
+          <a:noFill/>
+          <a:ln>
+            <a:noFill/>
+          </a:ln>
+        </p:spPr>
+        <p:txBody>
+          <a:bodyPr wrap="square" rtlCol="0"/>
+          <a:lstStyle/>
+          <a:p>
+            <a:pPr lvl="0">
+              <a:buNone/>
+            </a:pPr>
+            <a:r>
+              <a:rPr lang="en-US" sz="2200" b="1">
+                <a:solidFill>
+                  <a:srgbClr val="7667E8"/>
+                </a:solidFill>
+                <a:latin typeface="Aptos"/>
+              </a:rPr>
+              <a:t>→</a:t>
+            </a:r>
+            <a:endParaRPr lang="en-US" sz="2200"/>
+          </a:p>
+        </p:txBody>
+      </p:sp>
+      <p:sp>
+        <p:nvSpPr>
+          <p:cNvPr id="29" name="card-29"/>
+          <p:cNvSpPr/>
+          <p:nvPr/>
+        </p:nvSpPr>
+        <p:spPr>
+          <a:xfrm>
+            <a:off x="9747504" y="1417320"/>
+            <a:ext cx="1417320" cy="1024128"/>
+          </a:xfrm>
+          <a:prstGeom prst="rect">
+            <a:avLst/>
+          </a:prstGeom>
+          <a:solidFill>
+            <a:srgbClr val="159B9A"/>
+          </a:solidFill>
+          <a:ln>
+            <a:noFill/>
+          </a:ln>
+        </p:spPr>
+      </p:sp>
+      <p:sp>
+        <p:nvSpPr>
+          <p:cNvPr id="30" name="card-text-29"/>
+          <p:cNvSpPr/>
+          <p:nvPr/>
+        </p:nvSpPr>
+        <p:spPr>
+          <a:xfrm>
+            <a:off x="9838944" y="1508760"/>
+            <a:ext cx="1234440" cy="841248"/>
+          </a:xfrm>
+          <a:prstGeom prst="rect">
+            <a:avLst/>
+          </a:prstGeom>
+          <a:noFill/>
+          <a:ln>
+            <a:noFill/>
+          </a:ln>
+        </p:spPr>
+        <p:txBody>
+          <a:bodyPr wrap="square" rtlCol="0"/>
+          <a:lstStyle/>
+          <a:p>
+            <a:pPr lvl="0">
+              <a:buNone/>
+            </a:pPr>
+            <a:r>
+              <a:rPr lang="en-US" sz="1400" b="1">
+                <a:solidFill>
+                  <a:srgbClr val="FFFFFF"/>
+                </a:solidFill>
+                <a:latin typeface="Aptos"/>
+              </a:rPr>
+              <a:t>PROVENANCE</a:t>
+            </a:r>
+            <a:endParaRPr lang="en-US" sz="1400"/>
+          </a:p>
+          <a:p>
+            <a:pPr lvl="0">
+              <a:buNone/>
+            </a:pPr>
+            <a:r>
+              <a:rPr lang="en-US" sz="900">
+                <a:solidFill>
+                  <a:srgbClr val="EAF4F5"/>
+                </a:solidFill>
+                <a:latin typeface="Aptos"/>
+              </a:rPr>
+              <a:t>traceable</a:t>
+            </a:r>
+            <a:endParaRPr lang="en-US" sz="900"/>
           </a:p>
         </p:txBody>
       </p:sp>
@@ -1580,7 +3607,7 @@
         </p:nvSpPr>
         <p:spPr>
           <a:xfrm>
-            <a:off x="749808" y="1261872"/>
+            <a:off x="658368" y="1261872"/>
             <a:ext cx="10698480" cy="4800600"/>
           </a:xfrm>
           <a:prstGeom prst="rect">
@@ -1811,7 +3838,7 @@
         </p:nvSpPr>
         <p:spPr>
           <a:xfrm>
-            <a:off x="749808" y="1261872"/>
+            <a:off x="658368" y="1261872"/>
             <a:ext cx="10698480" cy="4800600"/>
           </a:xfrm>
           <a:prstGeom prst="rect">
@@ -2057,7 +4084,7 @@
         </p:nvSpPr>
         <p:spPr>
           <a:xfrm>
-            <a:off x="749808" y="1261872"/>
+            <a:off x="658368" y="1261872"/>
             <a:ext cx="10698480" cy="4800600"/>
           </a:xfrm>
           <a:prstGeom prst="rect">
@@ -2288,7 +4315,7 @@
         </p:nvSpPr>
         <p:spPr>
           <a:xfrm>
-            <a:off x="749808" y="1261872"/>
+            <a:off x="658368" y="1261872"/>
             <a:ext cx="10698480" cy="4800600"/>
           </a:xfrm>
           <a:prstGeom prst="rect">
@@ -2504,8 +4531,8 @@
         </p:nvSpPr>
         <p:spPr>
           <a:xfrm>
-            <a:off x="749808" y="1261872"/>
-            <a:ext cx="10698480" cy="4800600"/>
+            <a:off x="658368" y="1261872"/>
+            <a:ext cx="3886200" cy="4800600"/>
           </a:xfrm>
           <a:prstGeom prst="rect">
             <a:avLst/>
@@ -2523,7 +4550,7 @@
               <a:buChar char="•"/>
             </a:pPr>
             <a:r>
-              <a:rPr lang="en-US" sz="1700">
+              <a:rPr lang="en-US" sz="1500">
                 <a:solidFill>
                   <a:srgbClr val="26364D"/>
                 </a:solidFill>
@@ -2531,14 +4558,14 @@
               </a:rPr>
               <a:t>Select a held-out synthetic patient</a:t>
             </a:r>
-            <a:endParaRPr lang="en-US" sz="1700"/>
+            <a:endParaRPr lang="en-US" sz="1500"/>
           </a:p>
           <a:p>
             <a:pPr lvl="0">
               <a:buChar char="•"/>
             </a:pPr>
             <a:r>
-              <a:rPr lang="en-US" sz="1700">
+              <a:rPr lang="en-US" sz="1500">
                 <a:solidFill>
                   <a:srgbClr val="26364D"/>
                 </a:solidFill>
@@ -2546,14 +4573,14 @@
               </a:rPr>
               <a:t>Replay the timeline in five-minute steps</a:t>
             </a:r>
-            <a:endParaRPr lang="en-US" sz="1700"/>
+            <a:endParaRPr lang="en-US" sz="1500"/>
           </a:p>
           <a:p>
             <a:pPr lvl="0">
               <a:buChar char="•"/>
             </a:pPr>
             <a:r>
-              <a:rPr lang="en-US" sz="1700">
+              <a:rPr lang="en-US" sz="1500">
                 <a:solidFill>
                   <a:srgbClr val="26364D"/>
                 </a:solidFill>
@@ -2561,7 +4588,428 @@
               </a:rPr>
               <a:t>Inspect context, forecast heads, intervals, event risk, and evidence</a:t>
             </a:r>
-            <a:endParaRPr lang="en-US" sz="1700"/>
+            <a:endParaRPr lang="en-US" sz="1500"/>
+          </a:p>
+        </p:txBody>
+      </p:sp>
+      <p:sp>
+        <p:nvSpPr>
+          <p:cNvPr id="20" name="card-20"/>
+          <p:cNvSpPr/>
+          <p:nvPr/>
+        </p:nvSpPr>
+        <p:spPr>
+          <a:xfrm>
+            <a:off x="4892040" y="1417320"/>
+            <a:ext cx="1417320" cy="1024128"/>
+          </a:xfrm>
+          <a:prstGeom prst="rect">
+            <a:avLst/>
+          </a:prstGeom>
+          <a:solidFill>
+            <a:srgbClr val="159B9A"/>
+          </a:solidFill>
+          <a:ln>
+            <a:noFill/>
+          </a:ln>
+        </p:spPr>
+      </p:sp>
+      <p:sp>
+        <p:nvSpPr>
+          <p:cNvPr id="21" name="card-text-20"/>
+          <p:cNvSpPr/>
+          <p:nvPr/>
+        </p:nvSpPr>
+        <p:spPr>
+          <a:xfrm>
+            <a:off x="4983480" y="1508760"/>
+            <a:ext cx="1234440" cy="841248"/>
+          </a:xfrm>
+          <a:prstGeom prst="rect">
+            <a:avLst/>
+          </a:prstGeom>
+          <a:noFill/>
+          <a:ln>
+            <a:noFill/>
+          </a:ln>
+        </p:spPr>
+        <p:txBody>
+          <a:bodyPr wrap="square" rtlCol="0"/>
+          <a:lstStyle/>
+          <a:p>
+            <a:pPr lvl="0">
+              <a:buNone/>
+            </a:pPr>
+            <a:r>
+              <a:rPr lang="en-US" sz="1400" b="1">
+                <a:solidFill>
+                  <a:srgbClr val="FFFFFF"/>
+                </a:solidFill>
+                <a:latin typeface="Aptos"/>
+              </a:rPr>
+              <a:t>SELECT</a:t>
+            </a:r>
+            <a:endParaRPr lang="en-US" sz="1400"/>
+          </a:p>
+          <a:p>
+            <a:pPr lvl="0">
+              <a:buNone/>
+            </a:pPr>
+            <a:r>
+              <a:rPr lang="en-US" sz="900">
+                <a:solidFill>
+                  <a:srgbClr val="EAF4F5"/>
+                </a:solidFill>
+                <a:latin typeface="Aptos"/>
+              </a:rPr>
+              <a:t>test patient</a:t>
+            </a:r>
+            <a:endParaRPr lang="en-US" sz="900"/>
+          </a:p>
+        </p:txBody>
+      </p:sp>
+      <p:sp>
+        <p:nvSpPr>
+          <p:cNvPr id="22" name="arrow-22"/>
+          <p:cNvSpPr/>
+          <p:nvPr/>
+        </p:nvSpPr>
+        <p:spPr>
+          <a:xfrm>
+            <a:off x="6318504" y="1700784"/>
+            <a:ext cx="260000" cy="430000"/>
+          </a:xfrm>
+          <a:prstGeom prst="rect">
+            <a:avLst/>
+          </a:prstGeom>
+          <a:noFill/>
+          <a:ln>
+            <a:noFill/>
+          </a:ln>
+        </p:spPr>
+        <p:txBody>
+          <a:bodyPr wrap="square" rtlCol="0"/>
+          <a:lstStyle/>
+          <a:p>
+            <a:pPr lvl="0">
+              <a:buNone/>
+            </a:pPr>
+            <a:r>
+              <a:rPr lang="en-US" sz="2200" b="1">
+                <a:solidFill>
+                  <a:srgbClr val="7667E8"/>
+                </a:solidFill>
+                <a:latin typeface="Aptos"/>
+              </a:rPr>
+              <a:t>→</a:t>
+            </a:r>
+            <a:endParaRPr lang="en-US" sz="2200"/>
+          </a:p>
+        </p:txBody>
+      </p:sp>
+      <p:sp>
+        <p:nvSpPr>
+          <p:cNvPr id="23" name="card-23"/>
+          <p:cNvSpPr/>
+          <p:nvPr/>
+        </p:nvSpPr>
+        <p:spPr>
+          <a:xfrm>
+            <a:off x="6510528" y="1417320"/>
+            <a:ext cx="1417320" cy="1024128"/>
+          </a:xfrm>
+          <a:prstGeom prst="rect">
+            <a:avLst/>
+          </a:prstGeom>
+          <a:solidFill>
+            <a:srgbClr val="7667E8"/>
+          </a:solidFill>
+          <a:ln>
+            <a:noFill/>
+          </a:ln>
+        </p:spPr>
+      </p:sp>
+      <p:sp>
+        <p:nvSpPr>
+          <p:cNvPr id="24" name="card-text-23"/>
+          <p:cNvSpPr/>
+          <p:nvPr/>
+        </p:nvSpPr>
+        <p:spPr>
+          <a:xfrm>
+            <a:off x="6601968" y="1508760"/>
+            <a:ext cx="1234440" cy="841248"/>
+          </a:xfrm>
+          <a:prstGeom prst="rect">
+            <a:avLst/>
+          </a:prstGeom>
+          <a:noFill/>
+          <a:ln>
+            <a:noFill/>
+          </a:ln>
+        </p:spPr>
+        <p:txBody>
+          <a:bodyPr wrap="square" rtlCol="0"/>
+          <a:lstStyle/>
+          <a:p>
+            <a:pPr lvl="0">
+              <a:buNone/>
+            </a:pPr>
+            <a:r>
+              <a:rPr lang="en-US" sz="1400" b="1">
+                <a:solidFill>
+                  <a:srgbClr val="FFFFFF"/>
+                </a:solidFill>
+                <a:latin typeface="Aptos"/>
+              </a:rPr>
+              <a:t>REPLAY</a:t>
+            </a:r>
+            <a:endParaRPr lang="en-US" sz="1400"/>
+          </a:p>
+          <a:p>
+            <a:pPr lvl="0">
+              <a:buNone/>
+            </a:pPr>
+            <a:r>
+              <a:rPr lang="en-US" sz="900">
+                <a:solidFill>
+                  <a:srgbClr val="EAF4F5"/>
+                </a:solidFill>
+                <a:latin typeface="Aptos"/>
+              </a:rPr>
+              <a:t>+5 min</a:t>
+            </a:r>
+            <a:endParaRPr lang="en-US" sz="900"/>
+          </a:p>
+        </p:txBody>
+      </p:sp>
+      <p:sp>
+        <p:nvSpPr>
+          <p:cNvPr id="25" name="arrow-25"/>
+          <p:cNvSpPr/>
+          <p:nvPr/>
+        </p:nvSpPr>
+        <p:spPr>
+          <a:xfrm>
+            <a:off x="7936992" y="1700784"/>
+            <a:ext cx="260000" cy="430000"/>
+          </a:xfrm>
+          <a:prstGeom prst="rect">
+            <a:avLst/>
+          </a:prstGeom>
+          <a:noFill/>
+          <a:ln>
+            <a:noFill/>
+          </a:ln>
+        </p:spPr>
+        <p:txBody>
+          <a:bodyPr wrap="square" rtlCol="0"/>
+          <a:lstStyle/>
+          <a:p>
+            <a:pPr lvl="0">
+              <a:buNone/>
+            </a:pPr>
+            <a:r>
+              <a:rPr lang="en-US" sz="2200" b="1">
+                <a:solidFill>
+                  <a:srgbClr val="7667E8"/>
+                </a:solidFill>
+                <a:latin typeface="Aptos"/>
+              </a:rPr>
+              <a:t>→</a:t>
+            </a:r>
+            <a:endParaRPr lang="en-US" sz="2200"/>
+          </a:p>
+        </p:txBody>
+      </p:sp>
+      <p:sp>
+        <p:nvSpPr>
+          <p:cNvPr id="26" name="card-26"/>
+          <p:cNvSpPr/>
+          <p:nvPr/>
+        </p:nvSpPr>
+        <p:spPr>
+          <a:xfrm>
+            <a:off x="8129016" y="1417320"/>
+            <a:ext cx="1417320" cy="1024128"/>
+          </a:xfrm>
+          <a:prstGeom prst="rect">
+            <a:avLst/>
+          </a:prstGeom>
+          <a:solidFill>
+            <a:srgbClr val="159B9A"/>
+          </a:solidFill>
+          <a:ln>
+            <a:noFill/>
+          </a:ln>
+        </p:spPr>
+      </p:sp>
+      <p:sp>
+        <p:nvSpPr>
+          <p:cNvPr id="27" name="card-text-26"/>
+          <p:cNvSpPr/>
+          <p:nvPr/>
+        </p:nvSpPr>
+        <p:spPr>
+          <a:xfrm>
+            <a:off x="8220456" y="1508760"/>
+            <a:ext cx="1234440" cy="841248"/>
+          </a:xfrm>
+          <a:prstGeom prst="rect">
+            <a:avLst/>
+          </a:prstGeom>
+          <a:noFill/>
+          <a:ln>
+            <a:noFill/>
+          </a:ln>
+        </p:spPr>
+        <p:txBody>
+          <a:bodyPr wrap="square" rtlCol="0"/>
+          <a:lstStyle/>
+          <a:p>
+            <a:pPr lvl="0">
+              <a:buNone/>
+            </a:pPr>
+            <a:r>
+              <a:rPr lang="en-US" sz="1400" b="1">
+                <a:solidFill>
+                  <a:srgbClr val="FFFFFF"/>
+                </a:solidFill>
+                <a:latin typeface="Aptos"/>
+              </a:rPr>
+              <a:t>FORECAST</a:t>
+            </a:r>
+            <a:endParaRPr lang="en-US" sz="1400"/>
+          </a:p>
+          <a:p>
+            <a:pPr lvl="0">
+              <a:buNone/>
+            </a:pPr>
+            <a:r>
+              <a:rPr lang="en-US" sz="900">
+                <a:solidFill>
+                  <a:srgbClr val="EAF4F5"/>
+                </a:solidFill>
+                <a:latin typeface="Aptos"/>
+              </a:rPr>
+              <a:t>heads + bands</a:t>
+            </a:r>
+            <a:endParaRPr lang="en-US" sz="900"/>
+          </a:p>
+        </p:txBody>
+      </p:sp>
+      <p:sp>
+        <p:nvSpPr>
+          <p:cNvPr id="28" name="arrow-28"/>
+          <p:cNvSpPr/>
+          <p:nvPr/>
+        </p:nvSpPr>
+        <p:spPr>
+          <a:xfrm>
+            <a:off x="9555480" y="1700784"/>
+            <a:ext cx="260000" cy="430000"/>
+          </a:xfrm>
+          <a:prstGeom prst="rect">
+            <a:avLst/>
+          </a:prstGeom>
+          <a:noFill/>
+          <a:ln>
+            <a:noFill/>
+          </a:ln>
+        </p:spPr>
+        <p:txBody>
+          <a:bodyPr wrap="square" rtlCol="0"/>
+          <a:lstStyle/>
+          <a:p>
+            <a:pPr lvl="0">
+              <a:buNone/>
+            </a:pPr>
+            <a:r>
+              <a:rPr lang="en-US" sz="2200" b="1">
+                <a:solidFill>
+                  <a:srgbClr val="7667E8"/>
+                </a:solidFill>
+                <a:latin typeface="Aptos"/>
+              </a:rPr>
+              <a:t>→</a:t>
+            </a:r>
+            <a:endParaRPr lang="en-US" sz="2200"/>
+          </a:p>
+        </p:txBody>
+      </p:sp>
+      <p:sp>
+        <p:nvSpPr>
+          <p:cNvPr id="29" name="card-29"/>
+          <p:cNvSpPr/>
+          <p:nvPr/>
+        </p:nvSpPr>
+        <p:spPr>
+          <a:xfrm>
+            <a:off x="9747504" y="1417320"/>
+            <a:ext cx="1417320" cy="1024128"/>
+          </a:xfrm>
+          <a:prstGeom prst="rect">
+            <a:avLst/>
+          </a:prstGeom>
+          <a:solidFill>
+            <a:srgbClr val="7667E8"/>
+          </a:solidFill>
+          <a:ln>
+            <a:noFill/>
+          </a:ln>
+        </p:spPr>
+      </p:sp>
+      <p:sp>
+        <p:nvSpPr>
+          <p:cNvPr id="30" name="card-text-29"/>
+          <p:cNvSpPr/>
+          <p:nvPr/>
+        </p:nvSpPr>
+        <p:spPr>
+          <a:xfrm>
+            <a:off x="9838944" y="1508760"/>
+            <a:ext cx="1234440" cy="841248"/>
+          </a:xfrm>
+          <a:prstGeom prst="rect">
+            <a:avLst/>
+          </a:prstGeom>
+          <a:noFill/>
+          <a:ln>
+            <a:noFill/>
+          </a:ln>
+        </p:spPr>
+        <p:txBody>
+          <a:bodyPr wrap="square" rtlCol="0"/>
+          <a:lstStyle/>
+          <a:p>
+            <a:pPr lvl="0">
+              <a:buNone/>
+            </a:pPr>
+            <a:r>
+              <a:rPr lang="en-US" sz="1400" b="1">
+                <a:solidFill>
+                  <a:srgbClr val="FFFFFF"/>
+                </a:solidFill>
+                <a:latin typeface="Aptos"/>
+              </a:rPr>
+              <a:t>EVIDENCE</a:t>
+            </a:r>
+            <a:endParaRPr lang="en-US" sz="1400"/>
+          </a:p>
+          <a:p>
+            <a:pPr lvl="0">
+              <a:buNone/>
+            </a:pPr>
+            <a:r>
+              <a:rPr lang="en-US" sz="900">
+                <a:solidFill>
+                  <a:srgbClr val="EAF4F5"/>
+                </a:solidFill>
+                <a:latin typeface="Aptos"/>
+              </a:rPr>
+              <a:t>limitations</a:t>
+            </a:r>
+            <a:endParaRPr lang="en-US" sz="900"/>
           </a:p>
         </p:txBody>
       </p:sp>
@@ -2720,7 +5168,7 @@
         </p:nvSpPr>
         <p:spPr>
           <a:xfrm>
-            <a:off x="749808" y="1261872"/>
+            <a:off x="658368" y="1261872"/>
             <a:ext cx="10698480" cy="4800600"/>
           </a:xfrm>
           <a:prstGeom prst="rect">
@@ -2951,8 +5399,8 @@
         </p:nvSpPr>
         <p:spPr>
           <a:xfrm>
-            <a:off x="749808" y="1261872"/>
-            <a:ext cx="10698480" cy="4800600"/>
+            <a:off x="658368" y="1261872"/>
+            <a:ext cx="3886200" cy="4800600"/>
           </a:xfrm>
           <a:prstGeom prst="rect">
             <a:avLst/>
@@ -2970,7 +5418,7 @@
               <a:buChar char="•"/>
             </a:pPr>
             <a:r>
-              <a:rPr lang="en-US" sz="1700">
+              <a:rPr lang="en-US" sz="1500">
                 <a:solidFill>
                   <a:srgbClr val="26364D"/>
                 </a:solidFill>
@@ -2978,14 +5426,14 @@
               </a:rPr>
               <a:t>36 training patients</a:t>
             </a:r>
-            <a:endParaRPr lang="en-US" sz="1700"/>
+            <a:endParaRPr lang="en-US" sz="1500"/>
           </a:p>
           <a:p>
             <a:pPr lvl="0">
               <a:buChar char="•"/>
             </a:pPr>
             <a:r>
-              <a:rPr lang="en-US" sz="1700">
+              <a:rPr lang="en-US" sz="1500">
                 <a:solidFill>
                   <a:srgbClr val="26364D"/>
                 </a:solidFill>
@@ -2993,14 +5441,14 @@
               </a:rPr>
               <a:t>6 calibration-tuning patients</a:t>
             </a:r>
-            <a:endParaRPr lang="en-US" sz="1700"/>
+            <a:endParaRPr lang="en-US" sz="1500"/>
           </a:p>
           <a:p>
             <a:pPr lvl="0">
               <a:buChar char="•"/>
             </a:pPr>
             <a:r>
-              <a:rPr lang="en-US" sz="1700">
+              <a:rPr lang="en-US" sz="1500">
                 <a:solidFill>
                   <a:srgbClr val="26364D"/>
                 </a:solidFill>
@@ -3008,14 +5456,14 @@
               </a:rPr>
               <a:t>6 calibration-interval patients</a:t>
             </a:r>
-            <a:endParaRPr lang="en-US" sz="1700"/>
+            <a:endParaRPr lang="en-US" sz="1500"/>
           </a:p>
           <a:p>
             <a:pPr lvl="0">
               <a:buChar char="•"/>
             </a:pPr>
             <a:r>
-              <a:rPr lang="en-US" sz="1700">
+              <a:rPr lang="en-US" sz="1500">
                 <a:solidFill>
                   <a:srgbClr val="26364D"/>
                 </a:solidFill>
@@ -3023,14 +5471,14 @@
               </a:rPr>
               <a:t>12 held-out test patients</a:t>
             </a:r>
-            <a:endParaRPr lang="en-US" sz="1700"/>
+            <a:endParaRPr lang="en-US" sz="1500"/>
           </a:p>
           <a:p>
             <a:pPr lvl="0">
               <a:buChar char="•"/>
             </a:pPr>
             <a:r>
-              <a:rPr lang="en-US" sz="1700">
+              <a:rPr lang="en-US" sz="1500">
                 <a:solidFill>
                   <a:srgbClr val="26364D"/>
                 </a:solidFill>
@@ -3038,7 +5486,504 @@
               </a:rPr>
               <a:t>Past-only features at every replay anchor</a:t>
             </a:r>
-            <a:endParaRPr lang="en-US" sz="1700"/>
+            <a:endParaRPr lang="en-US" sz="1500"/>
+          </a:p>
+        </p:txBody>
+      </p:sp>
+      <p:sp>
+        <p:nvSpPr>
+          <p:cNvPr id="20" name="card-20"/>
+          <p:cNvSpPr/>
+          <p:nvPr/>
+        </p:nvSpPr>
+        <p:spPr>
+          <a:xfrm>
+            <a:off x="4892040" y="1417320"/>
+            <a:ext cx="1417320" cy="1024128"/>
+          </a:xfrm>
+          <a:prstGeom prst="rect">
+            <a:avLst/>
+          </a:prstGeom>
+          <a:solidFill>
+            <a:srgbClr val="159B9A"/>
+          </a:solidFill>
+          <a:ln>
+            <a:noFill/>
+          </a:ln>
+        </p:spPr>
+      </p:sp>
+      <p:sp>
+        <p:nvSpPr>
+          <p:cNvPr id="21" name="card-text-20"/>
+          <p:cNvSpPr/>
+          <p:nvPr/>
+        </p:nvSpPr>
+        <p:spPr>
+          <a:xfrm>
+            <a:off x="4983480" y="1508760"/>
+            <a:ext cx="1234440" cy="841248"/>
+          </a:xfrm>
+          <a:prstGeom prst="rect">
+            <a:avLst/>
+          </a:prstGeom>
+          <a:noFill/>
+          <a:ln>
+            <a:noFill/>
+          </a:ln>
+        </p:spPr>
+        <p:txBody>
+          <a:bodyPr wrap="square" rtlCol="0"/>
+          <a:lstStyle/>
+          <a:p>
+            <a:pPr lvl="0">
+              <a:buNone/>
+            </a:pPr>
+            <a:r>
+              <a:rPr lang="en-US" sz="1400" b="1">
+                <a:solidFill>
+                  <a:srgbClr val="FFFFFF"/>
+                </a:solidFill>
+                <a:latin typeface="Aptos"/>
+              </a:rPr>
+              <a:t>TRAIN</a:t>
+            </a:r>
+            <a:endParaRPr lang="en-US" sz="1400"/>
+          </a:p>
+          <a:p>
+            <a:pPr lvl="0">
+              <a:buNone/>
+            </a:pPr>
+            <a:r>
+              <a:rPr lang="en-US" sz="900">
+                <a:solidFill>
+                  <a:srgbClr val="EAF4F5"/>
+                </a:solidFill>
+                <a:latin typeface="Aptos"/>
+              </a:rPr>
+              <a:t>36 patients</a:t>
+            </a:r>
+            <a:endParaRPr lang="en-US" sz="900"/>
+          </a:p>
+        </p:txBody>
+      </p:sp>
+      <p:sp>
+        <p:nvSpPr>
+          <p:cNvPr id="22" name="arrow-22"/>
+          <p:cNvSpPr/>
+          <p:nvPr/>
+        </p:nvSpPr>
+        <p:spPr>
+          <a:xfrm>
+            <a:off x="6318504" y="1700784"/>
+            <a:ext cx="260000" cy="430000"/>
+          </a:xfrm>
+          <a:prstGeom prst="rect">
+            <a:avLst/>
+          </a:prstGeom>
+          <a:noFill/>
+          <a:ln>
+            <a:noFill/>
+          </a:ln>
+        </p:spPr>
+        <p:txBody>
+          <a:bodyPr wrap="square" rtlCol="0"/>
+          <a:lstStyle/>
+          <a:p>
+            <a:pPr lvl="0">
+              <a:buNone/>
+            </a:pPr>
+            <a:r>
+              <a:rPr lang="en-US" sz="2200" b="1">
+                <a:solidFill>
+                  <a:srgbClr val="7667E8"/>
+                </a:solidFill>
+                <a:latin typeface="Aptos"/>
+              </a:rPr>
+              <a:t>→</a:t>
+            </a:r>
+            <a:endParaRPr lang="en-US" sz="2200"/>
+          </a:p>
+        </p:txBody>
+      </p:sp>
+      <p:sp>
+        <p:nvSpPr>
+          <p:cNvPr id="23" name="card-23"/>
+          <p:cNvSpPr/>
+          <p:nvPr/>
+        </p:nvSpPr>
+        <p:spPr>
+          <a:xfrm>
+            <a:off x="6510528" y="1417320"/>
+            <a:ext cx="1417320" cy="1024128"/>
+          </a:xfrm>
+          <a:prstGeom prst="rect">
+            <a:avLst/>
+          </a:prstGeom>
+          <a:solidFill>
+            <a:srgbClr val="7667E8"/>
+          </a:solidFill>
+          <a:ln>
+            <a:noFill/>
+          </a:ln>
+        </p:spPr>
+      </p:sp>
+      <p:sp>
+        <p:nvSpPr>
+          <p:cNvPr id="24" name="card-text-23"/>
+          <p:cNvSpPr/>
+          <p:nvPr/>
+        </p:nvSpPr>
+        <p:spPr>
+          <a:xfrm>
+            <a:off x="6601968" y="1508760"/>
+            <a:ext cx="1234440" cy="841248"/>
+          </a:xfrm>
+          <a:prstGeom prst="rect">
+            <a:avLst/>
+          </a:prstGeom>
+          <a:noFill/>
+          <a:ln>
+            <a:noFill/>
+          </a:ln>
+        </p:spPr>
+        <p:txBody>
+          <a:bodyPr wrap="square" rtlCol="0"/>
+          <a:lstStyle/>
+          <a:p>
+            <a:pPr lvl="0">
+              <a:buNone/>
+            </a:pPr>
+            <a:r>
+              <a:rPr lang="en-US" sz="1400" b="1">
+                <a:solidFill>
+                  <a:srgbClr val="FFFFFF"/>
+                </a:solidFill>
+                <a:latin typeface="Aptos"/>
+              </a:rPr>
+              <a:t>TUNE</a:t>
+            </a:r>
+            <a:endParaRPr lang="en-US" sz="1400"/>
+          </a:p>
+          <a:p>
+            <a:pPr lvl="0">
+              <a:buNone/>
+            </a:pPr>
+            <a:r>
+              <a:rPr lang="en-US" sz="900">
+                <a:solidFill>
+                  <a:srgbClr val="EAF4F5"/>
+                </a:solidFill>
+                <a:latin typeface="Aptos"/>
+              </a:rPr>
+              <a:t>6 patients</a:t>
+            </a:r>
+            <a:endParaRPr lang="en-US" sz="900"/>
+          </a:p>
+        </p:txBody>
+      </p:sp>
+      <p:sp>
+        <p:nvSpPr>
+          <p:cNvPr id="25" name="arrow-25"/>
+          <p:cNvSpPr/>
+          <p:nvPr/>
+        </p:nvSpPr>
+        <p:spPr>
+          <a:xfrm>
+            <a:off x="7936992" y="1700784"/>
+            <a:ext cx="260000" cy="430000"/>
+          </a:xfrm>
+          <a:prstGeom prst="rect">
+            <a:avLst/>
+          </a:prstGeom>
+          <a:noFill/>
+          <a:ln>
+            <a:noFill/>
+          </a:ln>
+        </p:spPr>
+        <p:txBody>
+          <a:bodyPr wrap="square" rtlCol="0"/>
+          <a:lstStyle/>
+          <a:p>
+            <a:pPr lvl="0">
+              <a:buNone/>
+            </a:pPr>
+            <a:r>
+              <a:rPr lang="en-US" sz="2200" b="1">
+                <a:solidFill>
+                  <a:srgbClr val="7667E8"/>
+                </a:solidFill>
+                <a:latin typeface="Aptos"/>
+              </a:rPr>
+              <a:t>→</a:t>
+            </a:r>
+            <a:endParaRPr lang="en-US" sz="2200"/>
+          </a:p>
+        </p:txBody>
+      </p:sp>
+      <p:sp>
+        <p:nvSpPr>
+          <p:cNvPr id="26" name="card-26"/>
+          <p:cNvSpPr/>
+          <p:nvPr/>
+        </p:nvSpPr>
+        <p:spPr>
+          <a:xfrm>
+            <a:off x="8129016" y="1417320"/>
+            <a:ext cx="1417320" cy="1024128"/>
+          </a:xfrm>
+          <a:prstGeom prst="rect">
+            <a:avLst/>
+          </a:prstGeom>
+          <a:solidFill>
+            <a:srgbClr val="159B9A"/>
+          </a:solidFill>
+          <a:ln>
+            <a:noFill/>
+          </a:ln>
+        </p:spPr>
+      </p:sp>
+      <p:sp>
+        <p:nvSpPr>
+          <p:cNvPr id="27" name="card-text-26"/>
+          <p:cNvSpPr/>
+          <p:nvPr/>
+        </p:nvSpPr>
+        <p:spPr>
+          <a:xfrm>
+            <a:off x="8220456" y="1508760"/>
+            <a:ext cx="1234440" cy="841248"/>
+          </a:xfrm>
+          <a:prstGeom prst="rect">
+            <a:avLst/>
+          </a:prstGeom>
+          <a:noFill/>
+          <a:ln>
+            <a:noFill/>
+          </a:ln>
+        </p:spPr>
+        <p:txBody>
+          <a:bodyPr wrap="square" rtlCol="0"/>
+          <a:lstStyle/>
+          <a:p>
+            <a:pPr lvl="0">
+              <a:buNone/>
+            </a:pPr>
+            <a:r>
+              <a:rPr lang="en-US" sz="1400" b="1">
+                <a:solidFill>
+                  <a:srgbClr val="FFFFFF"/>
+                </a:solidFill>
+                <a:latin typeface="Aptos"/>
+              </a:rPr>
+              <a:t>INTERVAL</a:t>
+            </a:r>
+            <a:endParaRPr lang="en-US" sz="1400"/>
+          </a:p>
+          <a:p>
+            <a:pPr lvl="0">
+              <a:buNone/>
+            </a:pPr>
+            <a:r>
+              <a:rPr lang="en-US" sz="900">
+                <a:solidFill>
+                  <a:srgbClr val="EAF4F5"/>
+                </a:solidFill>
+                <a:latin typeface="Aptos"/>
+              </a:rPr>
+              <a:t>6 patients</a:t>
+            </a:r>
+            <a:endParaRPr lang="en-US" sz="900"/>
+          </a:p>
+        </p:txBody>
+      </p:sp>
+      <p:sp>
+        <p:nvSpPr>
+          <p:cNvPr id="28" name="arrow-28"/>
+          <p:cNvSpPr/>
+          <p:nvPr/>
+        </p:nvSpPr>
+        <p:spPr>
+          <a:xfrm>
+            <a:off x="9555480" y="1700784"/>
+            <a:ext cx="260000" cy="430000"/>
+          </a:xfrm>
+          <a:prstGeom prst="rect">
+            <a:avLst/>
+          </a:prstGeom>
+          <a:noFill/>
+          <a:ln>
+            <a:noFill/>
+          </a:ln>
+        </p:spPr>
+        <p:txBody>
+          <a:bodyPr wrap="square" rtlCol="0"/>
+          <a:lstStyle/>
+          <a:p>
+            <a:pPr lvl="0">
+              <a:buNone/>
+            </a:pPr>
+            <a:r>
+              <a:rPr lang="en-US" sz="2200" b="1">
+                <a:solidFill>
+                  <a:srgbClr val="7667E8"/>
+                </a:solidFill>
+                <a:latin typeface="Aptos"/>
+              </a:rPr>
+              <a:t>→</a:t>
+            </a:r>
+            <a:endParaRPr lang="en-US" sz="2200"/>
+          </a:p>
+        </p:txBody>
+      </p:sp>
+      <p:sp>
+        <p:nvSpPr>
+          <p:cNvPr id="29" name="card-29"/>
+          <p:cNvSpPr/>
+          <p:nvPr/>
+        </p:nvSpPr>
+        <p:spPr>
+          <a:xfrm>
+            <a:off x="9747504" y="1417320"/>
+            <a:ext cx="1417320" cy="1024128"/>
+          </a:xfrm>
+          <a:prstGeom prst="rect">
+            <a:avLst/>
+          </a:prstGeom>
+          <a:solidFill>
+            <a:srgbClr val="D58A36"/>
+          </a:solidFill>
+          <a:ln>
+            <a:noFill/>
+          </a:ln>
+        </p:spPr>
+      </p:sp>
+      <p:sp>
+        <p:nvSpPr>
+          <p:cNvPr id="30" name="card-text-29"/>
+          <p:cNvSpPr/>
+          <p:nvPr/>
+        </p:nvSpPr>
+        <p:spPr>
+          <a:xfrm>
+            <a:off x="9838944" y="1508760"/>
+            <a:ext cx="1234440" cy="841248"/>
+          </a:xfrm>
+          <a:prstGeom prst="rect">
+            <a:avLst/>
+          </a:prstGeom>
+          <a:noFill/>
+          <a:ln>
+            <a:noFill/>
+          </a:ln>
+        </p:spPr>
+        <p:txBody>
+          <a:bodyPr wrap="square" rtlCol="0"/>
+          <a:lstStyle/>
+          <a:p>
+            <a:pPr lvl="0">
+              <a:buNone/>
+            </a:pPr>
+            <a:r>
+              <a:rPr lang="en-US" sz="1400" b="1">
+                <a:solidFill>
+                  <a:srgbClr val="FFFFFF"/>
+                </a:solidFill>
+                <a:latin typeface="Aptos"/>
+              </a:rPr>
+              <a:t>TEST</a:t>
+            </a:r>
+            <a:endParaRPr lang="en-US" sz="1400"/>
+          </a:p>
+          <a:p>
+            <a:pPr lvl="0">
+              <a:buNone/>
+            </a:pPr>
+            <a:r>
+              <a:rPr lang="en-US" sz="900">
+                <a:solidFill>
+                  <a:srgbClr val="EAF4F5"/>
+                </a:solidFill>
+                <a:latin typeface="Aptos"/>
+              </a:rPr>
+              <a:t>12 held-out</a:t>
+            </a:r>
+            <a:endParaRPr lang="en-US" sz="900"/>
+          </a:p>
+        </p:txBody>
+      </p:sp>
+      <p:sp>
+        <p:nvSpPr>
+          <p:cNvPr id="31" name="card-31"/>
+          <p:cNvSpPr/>
+          <p:nvPr/>
+        </p:nvSpPr>
+        <p:spPr>
+          <a:xfrm>
+            <a:off x="4892040" y="3017520"/>
+            <a:ext cx="6309360" cy="1024128"/>
+          </a:xfrm>
+          <a:prstGeom prst="rect">
+            <a:avLst/>
+          </a:prstGeom>
+          <a:solidFill>
+            <a:srgbClr val="14253D"/>
+          </a:solidFill>
+          <a:ln>
+            <a:noFill/>
+          </a:ln>
+        </p:spPr>
+      </p:sp>
+      <p:sp>
+        <p:nvSpPr>
+          <p:cNvPr id="32" name="card-text-31"/>
+          <p:cNvSpPr/>
+          <p:nvPr/>
+        </p:nvSpPr>
+        <p:spPr>
+          <a:xfrm>
+            <a:off x="4983480" y="3108960"/>
+            <a:ext cx="6126480" cy="841248"/>
+          </a:xfrm>
+          <a:prstGeom prst="rect">
+            <a:avLst/>
+          </a:prstGeom>
+          <a:noFill/>
+          <a:ln>
+            <a:noFill/>
+          </a:ln>
+        </p:spPr>
+        <p:txBody>
+          <a:bodyPr wrap="square" rtlCol="0"/>
+          <a:lstStyle/>
+          <a:p>
+            <a:pPr lvl="0">
+              <a:buNone/>
+            </a:pPr>
+            <a:r>
+              <a:rPr lang="en-US" sz="1400" b="1">
+                <a:solidFill>
+                  <a:srgbClr val="FFFFFF"/>
+                </a:solidFill>
+                <a:latin typeface="Aptos"/>
+              </a:rPr>
+              <a:t>RULE</a:t>
+            </a:r>
+            <a:endParaRPr lang="en-US" sz="1400"/>
+          </a:p>
+          <a:p>
+            <a:pPr lvl="0">
+              <a:buNone/>
+            </a:pPr>
+            <a:r>
+              <a:rPr lang="en-US" sz="900">
+                <a:solidFill>
+                  <a:srgbClr val="EAF4F5"/>
+                </a:solidFill>
+                <a:latin typeface="Aptos"/>
+              </a:rPr>
+              <a:t>No test patient chooses a model setting; features stop at the replay anchor.</a:t>
+            </a:r>
+            <a:endParaRPr lang="en-US" sz="900"/>
           </a:p>
         </p:txBody>
       </p:sp>
@@ -3197,8 +6142,8 @@
         </p:nvSpPr>
         <p:spPr>
           <a:xfrm>
-            <a:off x="749808" y="1261872"/>
-            <a:ext cx="10698480" cy="4800600"/>
+            <a:off x="658368" y="1261872"/>
+            <a:ext cx="3886200" cy="4800600"/>
           </a:xfrm>
           <a:prstGeom prst="rect">
             <a:avLst/>
@@ -3216,7 +6161,7 @@
               <a:buChar char="•"/>
             </a:pPr>
             <a:r>
-              <a:rPr lang="en-US" sz="1700">
+              <a:rPr lang="en-US" sz="1500">
                 <a:solidFill>
                   <a:srgbClr val="26364D"/>
                 </a:solidFill>
@@ -3224,14 +6169,14 @@
               </a:rPr>
               <a:t>Small CPU temporal lag gradient-boosting heads</a:t>
             </a:r>
-            <a:endParaRPr lang="en-US" sz="1700"/>
+            <a:endParaRPr lang="en-US" sz="1500"/>
           </a:p>
           <a:p>
             <a:pPr lvl="0">
               <a:buChar char="•"/>
             </a:pPr>
             <a:r>
-              <a:rPr lang="en-US" sz="1700">
+              <a:rPr lang="en-US" sz="1500">
                 <a:solidFill>
                   <a:srgbClr val="26364D"/>
                 </a:solidFill>
@@ -3239,14 +6184,14 @@
               </a:rPr>
               <a:t>Calibrated fusion logistic event classifier</a:t>
             </a:r>
-            <a:endParaRPr lang="en-US" sz="1700"/>
+            <a:endParaRPr lang="en-US" sz="1500"/>
           </a:p>
           <a:p>
             <a:pPr lvl="0">
               <a:buChar char="•"/>
             </a:pPr>
             <a:r>
-              <a:rPr lang="en-US" sz="1700">
+              <a:rPr lang="en-US" sz="1500">
                 <a:solidFill>
                   <a:srgbClr val="26364D"/>
                 </a:solidFill>
@@ -3254,14 +6199,14 @@
               </a:rPr>
               <a:t>Train-only preprocessing and missingness indicators</a:t>
             </a:r>
-            <a:endParaRPr lang="en-US" sz="1700"/>
+            <a:endParaRPr lang="en-US" sz="1500"/>
           </a:p>
           <a:p>
             <a:pPr lvl="0">
               <a:buChar char="•"/>
             </a:pPr>
             <a:r>
-              <a:rPr lang="en-US" sz="1700">
+              <a:rPr lang="en-US" sz="1500">
                 <a:solidFill>
                   <a:srgbClr val="26364D"/>
                 </a:solidFill>
@@ -3269,7 +6214,504 @@
               </a:rPr>
               <a:t>Conformal intervals and explicit ablations</a:t>
             </a:r>
-            <a:endParaRPr lang="en-US" sz="1700"/>
+            <a:endParaRPr lang="en-US" sz="1500"/>
+          </a:p>
+        </p:txBody>
+      </p:sp>
+      <p:sp>
+        <p:nvSpPr>
+          <p:cNvPr id="20" name="card-20"/>
+          <p:cNvSpPr/>
+          <p:nvPr/>
+        </p:nvSpPr>
+        <p:spPr>
+          <a:xfrm>
+            <a:off x="4892040" y="1417320"/>
+            <a:ext cx="1417320" cy="1024128"/>
+          </a:xfrm>
+          <a:prstGeom prst="rect">
+            <a:avLst/>
+          </a:prstGeom>
+          <a:solidFill>
+            <a:srgbClr val="159B9A"/>
+          </a:solidFill>
+          <a:ln>
+            <a:noFill/>
+          </a:ln>
+        </p:spPr>
+      </p:sp>
+      <p:sp>
+        <p:nvSpPr>
+          <p:cNvPr id="21" name="card-text-20"/>
+          <p:cNvSpPr/>
+          <p:nvPr/>
+        </p:nvSpPr>
+        <p:spPr>
+          <a:xfrm>
+            <a:off x="4983480" y="1508760"/>
+            <a:ext cx="1234440" cy="841248"/>
+          </a:xfrm>
+          <a:prstGeom prst="rect">
+            <a:avLst/>
+          </a:prstGeom>
+          <a:noFill/>
+          <a:ln>
+            <a:noFill/>
+          </a:ln>
+        </p:spPr>
+        <p:txBody>
+          <a:bodyPr wrap="square" rtlCol="0"/>
+          <a:lstStyle/>
+          <a:p>
+            <a:pPr lvl="0">
+              <a:buNone/>
+            </a:pPr>
+            <a:r>
+              <a:rPr lang="en-US" sz="1400" b="1">
+                <a:solidFill>
+                  <a:srgbClr val="FFFFFF"/>
+                </a:solidFill>
+                <a:latin typeface="Aptos"/>
+              </a:rPr>
+              <a:t>FEATURES</a:t>
+            </a:r>
+            <a:endParaRPr lang="en-US" sz="1400"/>
+          </a:p>
+          <a:p>
+            <a:pPr lvl="0">
+              <a:buNone/>
+            </a:pPr>
+            <a:r>
+              <a:rPr lang="en-US" sz="900">
+                <a:solidFill>
+                  <a:srgbClr val="EAF4F5"/>
+                </a:solidFill>
+                <a:latin typeface="Aptos"/>
+              </a:rPr>
+              <a:t>lags + context</a:t>
+            </a:r>
+            <a:endParaRPr lang="en-US" sz="900"/>
+          </a:p>
+        </p:txBody>
+      </p:sp>
+      <p:sp>
+        <p:nvSpPr>
+          <p:cNvPr id="22" name="arrow-22"/>
+          <p:cNvSpPr/>
+          <p:nvPr/>
+        </p:nvSpPr>
+        <p:spPr>
+          <a:xfrm>
+            <a:off x="6318504" y="1700784"/>
+            <a:ext cx="260000" cy="430000"/>
+          </a:xfrm>
+          <a:prstGeom prst="rect">
+            <a:avLst/>
+          </a:prstGeom>
+          <a:noFill/>
+          <a:ln>
+            <a:noFill/>
+          </a:ln>
+        </p:spPr>
+        <p:txBody>
+          <a:bodyPr wrap="square" rtlCol="0"/>
+          <a:lstStyle/>
+          <a:p>
+            <a:pPr lvl="0">
+              <a:buNone/>
+            </a:pPr>
+            <a:r>
+              <a:rPr lang="en-US" sz="2200" b="1">
+                <a:solidFill>
+                  <a:srgbClr val="7667E8"/>
+                </a:solidFill>
+                <a:latin typeface="Aptos"/>
+              </a:rPr>
+              <a:t>→</a:t>
+            </a:r>
+            <a:endParaRPr lang="en-US" sz="2200"/>
+          </a:p>
+        </p:txBody>
+      </p:sp>
+      <p:sp>
+        <p:nvSpPr>
+          <p:cNvPr id="23" name="card-23"/>
+          <p:cNvSpPr/>
+          <p:nvPr/>
+        </p:nvSpPr>
+        <p:spPr>
+          <a:xfrm>
+            <a:off x="6510528" y="1417320"/>
+            <a:ext cx="1417320" cy="1024128"/>
+          </a:xfrm>
+          <a:prstGeom prst="rect">
+            <a:avLst/>
+          </a:prstGeom>
+          <a:solidFill>
+            <a:srgbClr val="7667E8"/>
+          </a:solidFill>
+          <a:ln>
+            <a:noFill/>
+          </a:ln>
+        </p:spPr>
+      </p:sp>
+      <p:sp>
+        <p:nvSpPr>
+          <p:cNvPr id="24" name="card-text-23"/>
+          <p:cNvSpPr/>
+          <p:nvPr/>
+        </p:nvSpPr>
+        <p:spPr>
+          <a:xfrm>
+            <a:off x="6601968" y="1508760"/>
+            <a:ext cx="1234440" cy="841248"/>
+          </a:xfrm>
+          <a:prstGeom prst="rect">
+            <a:avLst/>
+          </a:prstGeom>
+          <a:noFill/>
+          <a:ln>
+            <a:noFill/>
+          </a:ln>
+        </p:spPr>
+        <p:txBody>
+          <a:bodyPr wrap="square" rtlCol="0"/>
+          <a:lstStyle/>
+          <a:p>
+            <a:pPr lvl="0">
+              <a:buNone/>
+            </a:pPr>
+            <a:r>
+              <a:rPr lang="en-US" sz="1400" b="1">
+                <a:solidFill>
+                  <a:srgbClr val="FFFFFF"/>
+                </a:solidFill>
+                <a:latin typeface="Aptos"/>
+              </a:rPr>
+              <a:t>TEMPORAL</a:t>
+            </a:r>
+            <a:endParaRPr lang="en-US" sz="1400"/>
+          </a:p>
+          <a:p>
+            <a:pPr lvl="0">
+              <a:buNone/>
+            </a:pPr>
+            <a:r>
+              <a:rPr lang="en-US" sz="900">
+                <a:solidFill>
+                  <a:srgbClr val="EAF4F5"/>
+                </a:solidFill>
+                <a:latin typeface="Aptos"/>
+              </a:rPr>
+              <a:t>glucose heads</a:t>
+            </a:r>
+            <a:endParaRPr lang="en-US" sz="900"/>
+          </a:p>
+        </p:txBody>
+      </p:sp>
+      <p:sp>
+        <p:nvSpPr>
+          <p:cNvPr id="25" name="arrow-25"/>
+          <p:cNvSpPr/>
+          <p:nvPr/>
+        </p:nvSpPr>
+        <p:spPr>
+          <a:xfrm>
+            <a:off x="7936992" y="1700784"/>
+            <a:ext cx="260000" cy="430000"/>
+          </a:xfrm>
+          <a:prstGeom prst="rect">
+            <a:avLst/>
+          </a:prstGeom>
+          <a:noFill/>
+          <a:ln>
+            <a:noFill/>
+          </a:ln>
+        </p:spPr>
+        <p:txBody>
+          <a:bodyPr wrap="square" rtlCol="0"/>
+          <a:lstStyle/>
+          <a:p>
+            <a:pPr lvl="0">
+              <a:buNone/>
+            </a:pPr>
+            <a:r>
+              <a:rPr lang="en-US" sz="2200" b="1">
+                <a:solidFill>
+                  <a:srgbClr val="7667E8"/>
+                </a:solidFill>
+                <a:latin typeface="Aptos"/>
+              </a:rPr>
+              <a:t>→</a:t>
+            </a:r>
+            <a:endParaRPr lang="en-US" sz="2200"/>
+          </a:p>
+        </p:txBody>
+      </p:sp>
+      <p:sp>
+        <p:nvSpPr>
+          <p:cNvPr id="26" name="card-26"/>
+          <p:cNvSpPr/>
+          <p:nvPr/>
+        </p:nvSpPr>
+        <p:spPr>
+          <a:xfrm>
+            <a:off x="8129016" y="1417320"/>
+            <a:ext cx="1417320" cy="1024128"/>
+          </a:xfrm>
+          <a:prstGeom prst="rect">
+            <a:avLst/>
+          </a:prstGeom>
+          <a:solidFill>
+            <a:srgbClr val="159B9A"/>
+          </a:solidFill>
+          <a:ln>
+            <a:noFill/>
+          </a:ln>
+        </p:spPr>
+      </p:sp>
+      <p:sp>
+        <p:nvSpPr>
+          <p:cNvPr id="27" name="card-text-26"/>
+          <p:cNvSpPr/>
+          <p:nvPr/>
+        </p:nvSpPr>
+        <p:spPr>
+          <a:xfrm>
+            <a:off x="8220456" y="1508760"/>
+            <a:ext cx="1234440" cy="841248"/>
+          </a:xfrm>
+          <a:prstGeom prst="rect">
+            <a:avLst/>
+          </a:prstGeom>
+          <a:noFill/>
+          <a:ln>
+            <a:noFill/>
+          </a:ln>
+        </p:spPr>
+        <p:txBody>
+          <a:bodyPr wrap="square" rtlCol="0"/>
+          <a:lstStyle/>
+          <a:p>
+            <a:pPr lvl="0">
+              <a:buNone/>
+            </a:pPr>
+            <a:r>
+              <a:rPr lang="en-US" sz="1400" b="1">
+                <a:solidFill>
+                  <a:srgbClr val="FFFFFF"/>
+                </a:solidFill>
+                <a:latin typeface="Aptos"/>
+              </a:rPr>
+              <a:t>EVENT</a:t>
+            </a:r>
+            <a:endParaRPr lang="en-US" sz="1400"/>
+          </a:p>
+          <a:p>
+            <a:pPr lvl="0">
+              <a:buNone/>
+            </a:pPr>
+            <a:r>
+              <a:rPr lang="en-US" sz="900">
+                <a:solidFill>
+                  <a:srgbClr val="EAF4F5"/>
+                </a:solidFill>
+                <a:latin typeface="Aptos"/>
+              </a:rPr>
+              <a:t>fusion risk</a:t>
+            </a:r>
+            <a:endParaRPr lang="en-US" sz="900"/>
+          </a:p>
+        </p:txBody>
+      </p:sp>
+      <p:sp>
+        <p:nvSpPr>
+          <p:cNvPr id="28" name="arrow-28"/>
+          <p:cNvSpPr/>
+          <p:nvPr/>
+        </p:nvSpPr>
+        <p:spPr>
+          <a:xfrm>
+            <a:off x="9555480" y="1700784"/>
+            <a:ext cx="260000" cy="430000"/>
+          </a:xfrm>
+          <a:prstGeom prst="rect">
+            <a:avLst/>
+          </a:prstGeom>
+          <a:noFill/>
+          <a:ln>
+            <a:noFill/>
+          </a:ln>
+        </p:spPr>
+        <p:txBody>
+          <a:bodyPr wrap="square" rtlCol="0"/>
+          <a:lstStyle/>
+          <a:p>
+            <a:pPr lvl="0">
+              <a:buNone/>
+            </a:pPr>
+            <a:r>
+              <a:rPr lang="en-US" sz="2200" b="1">
+                <a:solidFill>
+                  <a:srgbClr val="7667E8"/>
+                </a:solidFill>
+                <a:latin typeface="Aptos"/>
+              </a:rPr>
+              <a:t>→</a:t>
+            </a:r>
+            <a:endParaRPr lang="en-US" sz="2200"/>
+          </a:p>
+        </p:txBody>
+      </p:sp>
+      <p:sp>
+        <p:nvSpPr>
+          <p:cNvPr id="29" name="card-29"/>
+          <p:cNvSpPr/>
+          <p:nvPr/>
+        </p:nvSpPr>
+        <p:spPr>
+          <a:xfrm>
+            <a:off x="9747504" y="1417320"/>
+            <a:ext cx="1417320" cy="1024128"/>
+          </a:xfrm>
+          <a:prstGeom prst="rect">
+            <a:avLst/>
+          </a:prstGeom>
+          <a:solidFill>
+            <a:srgbClr val="7667E8"/>
+          </a:solidFill>
+          <a:ln>
+            <a:noFill/>
+          </a:ln>
+        </p:spPr>
+      </p:sp>
+      <p:sp>
+        <p:nvSpPr>
+          <p:cNvPr id="30" name="card-text-29"/>
+          <p:cNvSpPr/>
+          <p:nvPr/>
+        </p:nvSpPr>
+        <p:spPr>
+          <a:xfrm>
+            <a:off x="9838944" y="1508760"/>
+            <a:ext cx="1234440" cy="841248"/>
+          </a:xfrm>
+          <a:prstGeom prst="rect">
+            <a:avLst/>
+          </a:prstGeom>
+          <a:noFill/>
+          <a:ln>
+            <a:noFill/>
+          </a:ln>
+        </p:spPr>
+        <p:txBody>
+          <a:bodyPr wrap="square" rtlCol="0"/>
+          <a:lstStyle/>
+          <a:p>
+            <a:pPr lvl="0">
+              <a:buNone/>
+            </a:pPr>
+            <a:r>
+              <a:rPr lang="en-US" sz="1400" b="1">
+                <a:solidFill>
+                  <a:srgbClr val="FFFFFF"/>
+                </a:solidFill>
+                <a:latin typeface="Aptos"/>
+              </a:rPr>
+              <a:t>CALIBRATE</a:t>
+            </a:r>
+            <a:endParaRPr lang="en-US" sz="1400"/>
+          </a:p>
+          <a:p>
+            <a:pPr lvl="0">
+              <a:buNone/>
+            </a:pPr>
+            <a:r>
+              <a:rPr lang="en-US" sz="900">
+                <a:solidFill>
+                  <a:srgbClr val="EAF4F5"/>
+                </a:solidFill>
+                <a:latin typeface="Aptos"/>
+              </a:rPr>
+              <a:t>honest intervals</a:t>
+            </a:r>
+            <a:endParaRPr lang="en-US" sz="900"/>
+          </a:p>
+        </p:txBody>
+      </p:sp>
+      <p:sp>
+        <p:nvSpPr>
+          <p:cNvPr id="31" name="card-31"/>
+          <p:cNvSpPr/>
+          <p:nvPr/>
+        </p:nvSpPr>
+        <p:spPr>
+          <a:xfrm>
+            <a:off x="4892040" y="3017520"/>
+            <a:ext cx="6309360" cy="1024128"/>
+          </a:xfrm>
+          <a:prstGeom prst="rect">
+            <a:avLst/>
+          </a:prstGeom>
+          <a:solidFill>
+            <a:srgbClr val="14253D"/>
+          </a:solidFill>
+          <a:ln>
+            <a:noFill/>
+          </a:ln>
+        </p:spPr>
+      </p:sp>
+      <p:sp>
+        <p:nvSpPr>
+          <p:cNvPr id="32" name="card-text-31"/>
+          <p:cNvSpPr/>
+          <p:nvPr/>
+        </p:nvSpPr>
+        <p:spPr>
+          <a:xfrm>
+            <a:off x="4983480" y="3108960"/>
+            <a:ext cx="6126480" cy="841248"/>
+          </a:xfrm>
+          <a:prstGeom prst="rect">
+            <a:avLst/>
+          </a:prstGeom>
+          <a:noFill/>
+          <a:ln>
+            <a:noFill/>
+          </a:ln>
+        </p:spPr>
+        <p:txBody>
+          <a:bodyPr wrap="square" rtlCol="0"/>
+          <a:lstStyle/>
+          <a:p>
+            <a:pPr lvl="0">
+              <a:buNone/>
+            </a:pPr>
+            <a:r>
+              <a:rPr lang="en-US" sz="1400" b="1">
+                <a:solidFill>
+                  <a:srgbClr val="FFFFFF"/>
+                </a:solidFill>
+                <a:latin typeface="Aptos"/>
+              </a:rPr>
+              <a:t>OUTPUT</a:t>
+            </a:r>
+            <a:endParaRPr lang="en-US" sz="1400"/>
+          </a:p>
+          <a:p>
+            <a:pPr lvl="0">
+              <a:buNone/>
+            </a:pPr>
+            <a:r>
+              <a:rPr lang="en-US" sz="900">
+                <a:solidFill>
+                  <a:srgbClr val="EAF4F5"/>
+                </a:solidFill>
+                <a:latin typeface="Aptos"/>
+              </a:rPr>
+              <a:t>30 / 60 / 120-minute heads + risk + reason + provenance</a:t>
+            </a:r>
+            <a:endParaRPr lang="en-US" sz="900"/>
           </a:p>
         </p:txBody>
       </p:sp>
@@ -3428,8 +6870,8 @@
         </p:nvSpPr>
         <p:spPr>
           <a:xfrm>
-            <a:off x="749808" y="1261872"/>
-            <a:ext cx="10698480" cy="4800600"/>
+            <a:off x="658368" y="1261872"/>
+            <a:ext cx="3886200" cy="4800600"/>
           </a:xfrm>
           <a:prstGeom prst="rect">
             <a:avLst/>
@@ -3447,7 +6889,7 @@
               <a:buChar char="•"/>
             </a:pPr>
             <a:r>
-              <a:rPr lang="en-US" sz="1700">
+              <a:rPr lang="en-US" sz="1500">
                 <a:solidFill>
                   <a:srgbClr val="26364D"/>
                 </a:solidFill>
@@ -3455,14 +6897,14 @@
               </a:rPr>
               <a:t>Make a forecast at time T</a:t>
             </a:r>
-            <a:endParaRPr lang="en-US" sz="1700"/>
+            <a:endParaRPr lang="en-US" sz="1500"/>
           </a:p>
           <a:p>
             <a:pPr lvl="0">
               <a:buChar char="•"/>
             </a:pPr>
             <a:r>
-              <a:rPr lang="en-US" sz="1700">
+              <a:rPr lang="en-US" sz="1500">
                 <a:solidFill>
                   <a:srgbClr val="26364D"/>
                 </a:solidFill>
@@ -3470,14 +6912,14 @@
               </a:rPr>
               <a:t>Wait for the target timestamp</a:t>
             </a:r>
-            <a:endParaRPr lang="en-US" sz="1700"/>
+            <a:endParaRPr lang="en-US" sz="1500"/>
           </a:p>
           <a:p>
             <a:pPr lvl="0">
               <a:buChar char="•"/>
             </a:pPr>
             <a:r>
-              <a:rPr lang="en-US" sz="1700">
+              <a:rPr lang="en-US" sz="1500">
                 <a:solidFill>
                   <a:srgbClr val="26364D"/>
                 </a:solidFill>
@@ -3485,14 +6927,14 @@
               </a:rPr>
               <a:t>Use a bounded history of matured errors for later forecasts</a:t>
             </a:r>
-            <a:endParaRPr lang="en-US" sz="1700"/>
+            <a:endParaRPr lang="en-US" sz="1500"/>
           </a:p>
           <a:p>
             <a:pPr lvl="0">
               <a:buChar char="•"/>
             </a:pPr>
             <a:r>
-              <a:rPr lang="en-US" sz="1700">
+              <a:rPr lang="en-US" sz="1500">
                 <a:solidFill>
                   <a:srgbClr val="26364D"/>
                 </a:solidFill>
@@ -3500,14 +6942,14 @@
               </a:rPr>
               <a:t>Never use the current forecast's future target</a:t>
             </a:r>
-            <a:endParaRPr lang="en-US" sz="1700"/>
+            <a:endParaRPr lang="en-US" sz="1500"/>
           </a:p>
           <a:p>
             <a:pPr lvl="0">
               <a:buChar char="•"/>
             </a:pPr>
             <a:r>
-              <a:rPr lang="en-US" sz="1700">
+              <a:rPr lang="en-US" sz="1500">
                 <a:solidFill>
                   <a:srgbClr val="26364D"/>
                 </a:solidFill>
@@ -3515,7 +6957,504 @@
               </a:rPr>
               <a:t>Adaptive residual, not clinical physiology</a:t>
             </a:r>
-            <a:endParaRPr lang="en-US" sz="1700"/>
+            <a:endParaRPr lang="en-US" sz="1500"/>
+          </a:p>
+        </p:txBody>
+      </p:sp>
+      <p:sp>
+        <p:nvSpPr>
+          <p:cNvPr id="20" name="card-20"/>
+          <p:cNvSpPr/>
+          <p:nvPr/>
+        </p:nvSpPr>
+        <p:spPr>
+          <a:xfrm>
+            <a:off x="4892040" y="1417320"/>
+            <a:ext cx="1417320" cy="1024128"/>
+          </a:xfrm>
+          <a:prstGeom prst="rect">
+            <a:avLst/>
+          </a:prstGeom>
+          <a:solidFill>
+            <a:srgbClr val="159B9A"/>
+          </a:solidFill>
+          <a:ln>
+            <a:noFill/>
+          </a:ln>
+        </p:spPr>
+      </p:sp>
+      <p:sp>
+        <p:nvSpPr>
+          <p:cNvPr id="21" name="card-text-20"/>
+          <p:cNvSpPr/>
+          <p:nvPr/>
+        </p:nvSpPr>
+        <p:spPr>
+          <a:xfrm>
+            <a:off x="4983480" y="1508760"/>
+            <a:ext cx="1234440" cy="841248"/>
+          </a:xfrm>
+          <a:prstGeom prst="rect">
+            <a:avLst/>
+          </a:prstGeom>
+          <a:noFill/>
+          <a:ln>
+            <a:noFill/>
+          </a:ln>
+        </p:spPr>
+        <p:txBody>
+          <a:bodyPr wrap="square" rtlCol="0"/>
+          <a:lstStyle/>
+          <a:p>
+            <a:pPr lvl="0">
+              <a:buNone/>
+            </a:pPr>
+            <a:r>
+              <a:rPr lang="en-US" sz="1400" b="1">
+                <a:solidFill>
+                  <a:srgbClr val="FFFFFF"/>
+                </a:solidFill>
+                <a:latin typeface="Aptos"/>
+              </a:rPr>
+              <a:t>T</a:t>
+            </a:r>
+            <a:endParaRPr lang="en-US" sz="1400"/>
+          </a:p>
+          <a:p>
+            <a:pPr lvl="0">
+              <a:buNone/>
+            </a:pPr>
+            <a:r>
+              <a:rPr lang="en-US" sz="900">
+                <a:solidFill>
+                  <a:srgbClr val="EAF4F5"/>
+                </a:solidFill>
+                <a:latin typeface="Aptos"/>
+              </a:rPr>
+              <a:t>forecast</a:t>
+            </a:r>
+            <a:endParaRPr lang="en-US" sz="900"/>
+          </a:p>
+        </p:txBody>
+      </p:sp>
+      <p:sp>
+        <p:nvSpPr>
+          <p:cNvPr id="22" name="arrow-22"/>
+          <p:cNvSpPr/>
+          <p:nvPr/>
+        </p:nvSpPr>
+        <p:spPr>
+          <a:xfrm>
+            <a:off x="6318504" y="1700784"/>
+            <a:ext cx="260000" cy="430000"/>
+          </a:xfrm>
+          <a:prstGeom prst="rect">
+            <a:avLst/>
+          </a:prstGeom>
+          <a:noFill/>
+          <a:ln>
+            <a:noFill/>
+          </a:ln>
+        </p:spPr>
+        <p:txBody>
+          <a:bodyPr wrap="square" rtlCol="0"/>
+          <a:lstStyle/>
+          <a:p>
+            <a:pPr lvl="0">
+              <a:buNone/>
+            </a:pPr>
+            <a:r>
+              <a:rPr lang="en-US" sz="2200" b="1">
+                <a:solidFill>
+                  <a:srgbClr val="7667E8"/>
+                </a:solidFill>
+                <a:latin typeface="Aptos"/>
+              </a:rPr>
+              <a:t>→</a:t>
+            </a:r>
+            <a:endParaRPr lang="en-US" sz="2200"/>
+          </a:p>
+        </p:txBody>
+      </p:sp>
+      <p:sp>
+        <p:nvSpPr>
+          <p:cNvPr id="23" name="card-23"/>
+          <p:cNvSpPr/>
+          <p:nvPr/>
+        </p:nvSpPr>
+        <p:spPr>
+          <a:xfrm>
+            <a:off x="6510528" y="1417320"/>
+            <a:ext cx="1417320" cy="1024128"/>
+          </a:xfrm>
+          <a:prstGeom prst="rect">
+            <a:avLst/>
+          </a:prstGeom>
+          <a:solidFill>
+            <a:srgbClr val="7667E8"/>
+          </a:solidFill>
+          <a:ln>
+            <a:noFill/>
+          </a:ln>
+        </p:spPr>
+      </p:sp>
+      <p:sp>
+        <p:nvSpPr>
+          <p:cNvPr id="24" name="card-text-23"/>
+          <p:cNvSpPr/>
+          <p:nvPr/>
+        </p:nvSpPr>
+        <p:spPr>
+          <a:xfrm>
+            <a:off x="6601968" y="1508760"/>
+            <a:ext cx="1234440" cy="841248"/>
+          </a:xfrm>
+          <a:prstGeom prst="rect">
+            <a:avLst/>
+          </a:prstGeom>
+          <a:noFill/>
+          <a:ln>
+            <a:noFill/>
+          </a:ln>
+        </p:spPr>
+        <p:txBody>
+          <a:bodyPr wrap="square" rtlCol="0"/>
+          <a:lstStyle/>
+          <a:p>
+            <a:pPr lvl="0">
+              <a:buNone/>
+            </a:pPr>
+            <a:r>
+              <a:rPr lang="en-US" sz="1400" b="1">
+                <a:solidFill>
+                  <a:srgbClr val="FFFFFF"/>
+                </a:solidFill>
+                <a:latin typeface="Aptos"/>
+              </a:rPr>
+              <a:t>TARGET</a:t>
+            </a:r>
+            <a:endParaRPr lang="en-US" sz="1400"/>
+          </a:p>
+          <a:p>
+            <a:pPr lvl="0">
+              <a:buNone/>
+            </a:pPr>
+            <a:r>
+              <a:rPr lang="en-US" sz="900">
+                <a:solidFill>
+                  <a:srgbClr val="EAF4F5"/>
+                </a:solidFill>
+                <a:latin typeface="Aptos"/>
+              </a:rPr>
+              <a:t>time arrives</a:t>
+            </a:r>
+            <a:endParaRPr lang="en-US" sz="900"/>
+          </a:p>
+        </p:txBody>
+      </p:sp>
+      <p:sp>
+        <p:nvSpPr>
+          <p:cNvPr id="25" name="arrow-25"/>
+          <p:cNvSpPr/>
+          <p:nvPr/>
+        </p:nvSpPr>
+        <p:spPr>
+          <a:xfrm>
+            <a:off x="7936992" y="1700784"/>
+            <a:ext cx="260000" cy="430000"/>
+          </a:xfrm>
+          <a:prstGeom prst="rect">
+            <a:avLst/>
+          </a:prstGeom>
+          <a:noFill/>
+          <a:ln>
+            <a:noFill/>
+          </a:ln>
+        </p:spPr>
+        <p:txBody>
+          <a:bodyPr wrap="square" rtlCol="0"/>
+          <a:lstStyle/>
+          <a:p>
+            <a:pPr lvl="0">
+              <a:buNone/>
+            </a:pPr>
+            <a:r>
+              <a:rPr lang="en-US" sz="2200" b="1">
+                <a:solidFill>
+                  <a:srgbClr val="7667E8"/>
+                </a:solidFill>
+                <a:latin typeface="Aptos"/>
+              </a:rPr>
+              <a:t>→</a:t>
+            </a:r>
+            <a:endParaRPr lang="en-US" sz="2200"/>
+          </a:p>
+        </p:txBody>
+      </p:sp>
+      <p:sp>
+        <p:nvSpPr>
+          <p:cNvPr id="26" name="card-26"/>
+          <p:cNvSpPr/>
+          <p:nvPr/>
+        </p:nvSpPr>
+        <p:spPr>
+          <a:xfrm>
+            <a:off x="8129016" y="1417320"/>
+            <a:ext cx="1417320" cy="1024128"/>
+          </a:xfrm>
+          <a:prstGeom prst="rect">
+            <a:avLst/>
+          </a:prstGeom>
+          <a:solidFill>
+            <a:srgbClr val="159B9A"/>
+          </a:solidFill>
+          <a:ln>
+            <a:noFill/>
+          </a:ln>
+        </p:spPr>
+      </p:sp>
+      <p:sp>
+        <p:nvSpPr>
+          <p:cNvPr id="27" name="card-text-26"/>
+          <p:cNvSpPr/>
+          <p:nvPr/>
+        </p:nvSpPr>
+        <p:spPr>
+          <a:xfrm>
+            <a:off x="8220456" y="1508760"/>
+            <a:ext cx="1234440" cy="841248"/>
+          </a:xfrm>
+          <a:prstGeom prst="rect">
+            <a:avLst/>
+          </a:prstGeom>
+          <a:noFill/>
+          <a:ln>
+            <a:noFill/>
+          </a:ln>
+        </p:spPr>
+        <p:txBody>
+          <a:bodyPr wrap="square" rtlCol="0"/>
+          <a:lstStyle/>
+          <a:p>
+            <a:pPr lvl="0">
+              <a:buNone/>
+            </a:pPr>
+            <a:r>
+              <a:rPr lang="en-US" sz="1400" b="1">
+                <a:solidFill>
+                  <a:srgbClr val="FFFFFF"/>
+                </a:solidFill>
+                <a:latin typeface="Aptos"/>
+              </a:rPr>
+              <a:t>ERROR</a:t>
+            </a:r>
+            <a:endParaRPr lang="en-US" sz="1400"/>
+          </a:p>
+          <a:p>
+            <a:pPr lvl="0">
+              <a:buNone/>
+            </a:pPr>
+            <a:r>
+              <a:rPr lang="en-US" sz="900">
+                <a:solidFill>
+                  <a:srgbClr val="EAF4F5"/>
+                </a:solidFill>
+                <a:latin typeface="Aptos"/>
+              </a:rPr>
+              <a:t>observed</a:t>
+            </a:r>
+            <a:endParaRPr lang="en-US" sz="900"/>
+          </a:p>
+        </p:txBody>
+      </p:sp>
+      <p:sp>
+        <p:nvSpPr>
+          <p:cNvPr id="28" name="arrow-28"/>
+          <p:cNvSpPr/>
+          <p:nvPr/>
+        </p:nvSpPr>
+        <p:spPr>
+          <a:xfrm>
+            <a:off x="9555480" y="1700784"/>
+            <a:ext cx="260000" cy="430000"/>
+          </a:xfrm>
+          <a:prstGeom prst="rect">
+            <a:avLst/>
+          </a:prstGeom>
+          <a:noFill/>
+          <a:ln>
+            <a:noFill/>
+          </a:ln>
+        </p:spPr>
+        <p:txBody>
+          <a:bodyPr wrap="square" rtlCol="0"/>
+          <a:lstStyle/>
+          <a:p>
+            <a:pPr lvl="0">
+              <a:buNone/>
+            </a:pPr>
+            <a:r>
+              <a:rPr lang="en-US" sz="2200" b="1">
+                <a:solidFill>
+                  <a:srgbClr val="7667E8"/>
+                </a:solidFill>
+                <a:latin typeface="Aptos"/>
+              </a:rPr>
+              <a:t>→</a:t>
+            </a:r>
+            <a:endParaRPr lang="en-US" sz="2200"/>
+          </a:p>
+        </p:txBody>
+      </p:sp>
+      <p:sp>
+        <p:nvSpPr>
+          <p:cNvPr id="29" name="card-29"/>
+          <p:cNvSpPr/>
+          <p:nvPr/>
+        </p:nvSpPr>
+        <p:spPr>
+          <a:xfrm>
+            <a:off x="9747504" y="1417320"/>
+            <a:ext cx="1417320" cy="1024128"/>
+          </a:xfrm>
+          <a:prstGeom prst="rect">
+            <a:avLst/>
+          </a:prstGeom>
+          <a:solidFill>
+            <a:srgbClr val="7667E8"/>
+          </a:solidFill>
+          <a:ln>
+            <a:noFill/>
+          </a:ln>
+        </p:spPr>
+      </p:sp>
+      <p:sp>
+        <p:nvSpPr>
+          <p:cNvPr id="30" name="card-text-29"/>
+          <p:cNvSpPr/>
+          <p:nvPr/>
+        </p:nvSpPr>
+        <p:spPr>
+          <a:xfrm>
+            <a:off x="9838944" y="1508760"/>
+            <a:ext cx="1234440" cy="841248"/>
+          </a:xfrm>
+          <a:prstGeom prst="rect">
+            <a:avLst/>
+          </a:prstGeom>
+          <a:noFill/>
+          <a:ln>
+            <a:noFill/>
+          </a:ln>
+        </p:spPr>
+        <p:txBody>
+          <a:bodyPr wrap="square" rtlCol="0"/>
+          <a:lstStyle/>
+          <a:p>
+            <a:pPr lvl="0">
+              <a:buNone/>
+            </a:pPr>
+            <a:r>
+              <a:rPr lang="en-US" sz="1400" b="1">
+                <a:solidFill>
+                  <a:srgbClr val="FFFFFF"/>
+                </a:solidFill>
+                <a:latin typeface="Aptos"/>
+              </a:rPr>
+              <a:t>T+1</a:t>
+            </a:r>
+            <a:endParaRPr lang="en-US" sz="1400"/>
+          </a:p>
+          <a:p>
+            <a:pPr lvl="0">
+              <a:buNone/>
+            </a:pPr>
+            <a:r>
+              <a:rPr lang="en-US" sz="900">
+                <a:solidFill>
+                  <a:srgbClr val="EAF4F5"/>
+                </a:solidFill>
+                <a:latin typeface="Aptos"/>
+              </a:rPr>
+              <a:t>bounded update</a:t>
+            </a:r>
+            <a:endParaRPr lang="en-US" sz="900"/>
+          </a:p>
+        </p:txBody>
+      </p:sp>
+      <p:sp>
+        <p:nvSpPr>
+          <p:cNvPr id="31" name="card-31"/>
+          <p:cNvSpPr/>
+          <p:nvPr/>
+        </p:nvSpPr>
+        <p:spPr>
+          <a:xfrm>
+            <a:off x="4892040" y="3017520"/>
+            <a:ext cx="6309360" cy="1024128"/>
+          </a:xfrm>
+          <a:prstGeom prst="rect">
+            <a:avLst/>
+          </a:prstGeom>
+          <a:solidFill>
+            <a:srgbClr val="14253D"/>
+          </a:solidFill>
+          <a:ln>
+            <a:noFill/>
+          </a:ln>
+        </p:spPr>
+      </p:sp>
+      <p:sp>
+        <p:nvSpPr>
+          <p:cNvPr id="32" name="card-text-31"/>
+          <p:cNvSpPr/>
+          <p:nvPr/>
+        </p:nvSpPr>
+        <p:spPr>
+          <a:xfrm>
+            <a:off x="4983480" y="3108960"/>
+            <a:ext cx="6126480" cy="841248"/>
+          </a:xfrm>
+          <a:prstGeom prst="rect">
+            <a:avLst/>
+          </a:prstGeom>
+          <a:noFill/>
+          <a:ln>
+            <a:noFill/>
+          </a:ln>
+        </p:spPr>
+        <p:txBody>
+          <a:bodyPr wrap="square" rtlCol="0"/>
+          <a:lstStyle/>
+          <a:p>
+            <a:pPr lvl="0">
+              <a:buNone/>
+            </a:pPr>
+            <a:r>
+              <a:rPr lang="en-US" sz="1400" b="1">
+                <a:solidFill>
+                  <a:srgbClr val="FFFFFF"/>
+                </a:solidFill>
+                <a:latin typeface="Aptos"/>
+              </a:rPr>
+              <a:t>GUARDRAIL</a:t>
+            </a:r>
+            <a:endParaRPr lang="en-US" sz="1400"/>
+          </a:p>
+          <a:p>
+            <a:pPr lvl="0">
+              <a:buNone/>
+            </a:pPr>
+            <a:r>
+              <a:rPr lang="en-US" sz="900">
+                <a:solidFill>
+                  <a:srgbClr val="EAF4F5"/>
+                </a:solidFill>
+                <a:latin typeface="Aptos"/>
+              </a:rPr>
+              <a:t>Future target cannot influence its own forecast. Adaptive residual != physiology.</a:t>
+            </a:r>
+            <a:endParaRPr lang="en-US" sz="900"/>
           </a:p>
         </p:txBody>
       </p:sp>
@@ -3674,7 +7613,7 @@
         </p:nvSpPr>
         <p:spPr>
           <a:xfrm>
-            <a:off x="749808" y="1261872"/>
+            <a:off x="658368" y="1261872"/>
             <a:ext cx="10698480" cy="4800600"/>
           </a:xfrm>
           <a:prstGeom prst="rect">
@@ -3905,7 +7844,7 @@
         </p:nvSpPr>
         <p:spPr>
           <a:xfrm>
-            <a:off x="749808" y="1261872"/>
+            <a:off x="658368" y="1261872"/>
             <a:ext cx="10698480" cy="4800600"/>
           </a:xfrm>
           <a:prstGeom prst="rect">
